--- a/v2/research/editable/RSI_AI_biology_loop_editable.pptx
+++ b/v2/research/editable/RSI_AI_biology_loop_editable.pptx
@@ -2,13 +2,13 @@
 <file path=ppt/presentation.xml><?xml version="1.0" encoding="utf-8"?>
 <p:presentation xmlns:p="http://schemas.openxmlformats.org/presentationml/2006/main">
   <p:sldMasterIdLst>
-    <p:sldMasterId xmlns:r="http://schemas.openxmlformats.org/officeDocument/2006/relationships" id="2147483648" r:id="R434f4dcab6f04afb"/>
+    <p:sldMasterId xmlns:r="http://schemas.openxmlformats.org/officeDocument/2006/relationships" id="2147483648" r:id="R4f0bf4732b8e4121"/>
   </p:sldMasterIdLst>
   <p:notesMasterIdLst>
-    <p:notesMasterId xmlns:r="http://schemas.openxmlformats.org/officeDocument/2006/relationships" r:id="Rb494662e579448f8"/>
+    <p:notesMasterId xmlns:r="http://schemas.openxmlformats.org/officeDocument/2006/relationships" r:id="R63b55ed06f364b31"/>
   </p:notesMasterIdLst>
   <p:sldIdLst>
-    <p:sldId xmlns:r="http://schemas.openxmlformats.org/officeDocument/2006/relationships" id="256" r:id="R1385657921874fa2"/>
+    <p:sldId xmlns:r="http://schemas.openxmlformats.org/officeDocument/2006/relationships" id="256" r:id="R02cc98d562fb49d9"/>
   </p:sldIdLst>
   <p:sldSz cx="22860000" cy="12858750"/>
   <p:notesSz cx="6858000" cy="9144000"/>
@@ -590,6 +590,21 @@
               <a:t/>
             </a:r>
           </a:p>
+          <a:p xmlns:a="http://schemas.openxmlformats.org/drawingml/2006/main">
+            <a:r>
+              <a:t/>
+            </a:r>
+          </a:p>
+          <a:p xmlns:a="http://schemas.openxmlformats.org/drawingml/2006/main">
+            <a:r>
+              <a:t>Palette updated to the user's eight RGB colors on 13 October 2026. Original company marks retain their brand colors.</a:t>
+            </a:r>
+          </a:p>
+          <a:p xmlns:a="http://schemas.openxmlformats.org/drawingml/2006/main">
+            <a:r>
+              <a:t/>
+            </a:r>
+          </a:p>
         </p:txBody>
       </p:sp>
       <p:sp>
@@ -634,7 +649,7 @@
           <p:cNvPr id="3" name="Title">
             <a:extLst xmlns:a="http://schemas.openxmlformats.org/drawingml/2006/main">
               <a:ext uri="{FF2B5EF4-FFF2-40B4-BE49-F238E27FC236}">
-                <a16:creationId xmlns:a16="http://schemas.microsoft.com/office/drawing/2014/main" id="{264DC7FC-1671-4FAE-BCF3-2D14A5A990E6}"/>
+                <a16:creationId xmlns:a16="http://schemas.microsoft.com/office/drawing/2014/main" id="{201B2C2B-7844-4CBF-8FFF-96E8B9445C1E}"/>
               </a:ext>
             </a:extLst>
           </p:cNvPr>
@@ -791,7 +806,7 @@
           <p:cNvPr id="2" name="Subtitle">
             <a:extLst xmlns:a="http://schemas.openxmlformats.org/drawingml/2006/main">
               <a:ext uri="{FF2B5EF4-FFF2-40B4-BE49-F238E27FC236}">
-                <a16:creationId xmlns:a16="http://schemas.microsoft.com/office/drawing/2014/main" id="{89D513F4-DAE7-4678-9EB6-DF0FC49A7DB6}"/>
+                <a16:creationId xmlns:a16="http://schemas.microsoft.com/office/drawing/2014/main" id="{EFBFAB88-929C-4967-8999-FB3B3CB9661C}"/>
               </a:ext>
             </a:extLst>
           </p:cNvPr>
@@ -965,7 +980,7 @@
           <p:cNvPr id="2" name="Section title">
             <a:extLst xmlns:a="http://schemas.openxmlformats.org/drawingml/2006/main">
               <a:ext uri="{FF2B5EF4-FFF2-40B4-BE49-F238E27FC236}">
-                <a16:creationId xmlns:a16="http://schemas.microsoft.com/office/drawing/2014/main" id="{CA75EC6E-7F61-4026-A90C-B8433600529B}"/>
+                <a16:creationId xmlns:a16="http://schemas.microsoft.com/office/drawing/2014/main" id="{E6A972BE-FA1D-4AD0-B85F-4BBCDE9D2C8B}"/>
               </a:ext>
             </a:extLst>
           </p:cNvPr>
@@ -1139,7 +1154,7 @@
           <p:cNvPr id="3" name="Title">
             <a:extLst xmlns:a="http://schemas.openxmlformats.org/drawingml/2006/main">
               <a:ext uri="{FF2B5EF4-FFF2-40B4-BE49-F238E27FC236}">
-                <a16:creationId xmlns:a16="http://schemas.microsoft.com/office/drawing/2014/main" id="{2FC91F40-C6C7-4A0D-B8FC-45596B5DF8CE}"/>
+                <a16:creationId xmlns:a16="http://schemas.microsoft.com/office/drawing/2014/main" id="{323EE9A0-40FB-431D-8E31-CCF5DB6AB50D}"/>
               </a:ext>
             </a:extLst>
           </p:cNvPr>
@@ -1296,7 +1311,7 @@
           <p:cNvPr id="2" name="Body">
             <a:extLst xmlns:a="http://schemas.openxmlformats.org/drawingml/2006/main">
               <a:ext uri="{FF2B5EF4-FFF2-40B4-BE49-F238E27FC236}">
-                <a16:creationId xmlns:a16="http://schemas.microsoft.com/office/drawing/2014/main" id="{AC6BE30D-CD4C-4FDF-B0E2-B72B82A731B8}"/>
+                <a16:creationId xmlns:a16="http://schemas.microsoft.com/office/drawing/2014/main" id="{86450D77-B27E-431A-A341-24AD4B143A5B}"/>
               </a:ext>
             </a:extLst>
           </p:cNvPr>
@@ -1470,7 +1485,7 @@
           <p:cNvPr id="4" name="Title">
             <a:extLst xmlns:a="http://schemas.openxmlformats.org/drawingml/2006/main">
               <a:ext uri="{FF2B5EF4-FFF2-40B4-BE49-F238E27FC236}">
-                <a16:creationId xmlns:a16="http://schemas.microsoft.com/office/drawing/2014/main" id="{6691015A-8DA8-4B92-BF8F-2CEB49EA68AB}"/>
+                <a16:creationId xmlns:a16="http://schemas.microsoft.com/office/drawing/2014/main" id="{7F9C40F6-E407-4E16-8978-17ED045BD710}"/>
               </a:ext>
             </a:extLst>
           </p:cNvPr>
@@ -1627,7 +1642,7 @@
           <p:cNvPr id="2" name="Left column">
             <a:extLst xmlns:a="http://schemas.openxmlformats.org/drawingml/2006/main">
               <a:ext uri="{FF2B5EF4-FFF2-40B4-BE49-F238E27FC236}">
-                <a16:creationId xmlns:a16="http://schemas.microsoft.com/office/drawing/2014/main" id="{5BF397D1-1EA3-4214-A339-DD242FCA23AD}"/>
+                <a16:creationId xmlns:a16="http://schemas.microsoft.com/office/drawing/2014/main" id="{00169B4E-D99B-46E7-82FE-4A8FAD0F1D21}"/>
               </a:ext>
             </a:extLst>
           </p:cNvPr>
@@ -1784,7 +1799,7 @@
           <p:cNvPr id="3" name="Right column">
             <a:extLst xmlns:a="http://schemas.openxmlformats.org/drawingml/2006/main">
               <a:ext uri="{FF2B5EF4-FFF2-40B4-BE49-F238E27FC236}">
-                <a16:creationId xmlns:a16="http://schemas.microsoft.com/office/drawing/2014/main" id="{97F6BC6A-54BB-4BE7-A45F-671AFE397241}"/>
+                <a16:creationId xmlns:a16="http://schemas.microsoft.com/office/drawing/2014/main" id="{7F545E2A-4978-4521-9301-D2730EE3A81F}"/>
               </a:ext>
             </a:extLst>
           </p:cNvPr>
@@ -1958,7 +1973,7 @@
           <p:cNvPr id="3" name="Title">
             <a:extLst xmlns:a="http://schemas.openxmlformats.org/drawingml/2006/main">
               <a:ext uri="{FF2B5EF4-FFF2-40B4-BE49-F238E27FC236}">
-                <a16:creationId xmlns:a16="http://schemas.microsoft.com/office/drawing/2014/main" id="{471131C6-EFA5-4F53-87B5-228C965BABB6}"/>
+                <a16:creationId xmlns:a16="http://schemas.microsoft.com/office/drawing/2014/main" id="{AC484C08-6358-45C3-B218-6CCE1F56ADFE}"/>
               </a:ext>
             </a:extLst>
           </p:cNvPr>
@@ -2115,7 +2130,7 @@
           <p:cNvPr id="2" name="Left column">
             <a:extLst xmlns:a="http://schemas.openxmlformats.org/drawingml/2006/main">
               <a:ext uri="{FF2B5EF4-FFF2-40B4-BE49-F238E27FC236}">
-                <a16:creationId xmlns:a16="http://schemas.microsoft.com/office/drawing/2014/main" id="{A222758F-DF27-4235-B0F5-1EB3D31AD58A}"/>
+                <a16:creationId xmlns:a16="http://schemas.microsoft.com/office/drawing/2014/main" id="{A8B4E14E-2645-4766-B31A-9326D8317193}"/>
               </a:ext>
             </a:extLst>
           </p:cNvPr>
@@ -2310,12 +2325,12 @@
   </p:cSld>
   <p:clrMap bg1="lt1" tx1="dk1" bg2="lt2" tx2="dk2" accent1="accent1" accent2="accent2" accent3="accent3" accent4="accent4" accent5="accent5" accent6="accent6" hlink="hlink" folHlink="folHlink"/>
   <p:sldLayoutIdLst>
-    <p:sldLayoutId xmlns:r="http://schemas.openxmlformats.org/officeDocument/2006/relationships" id="2147483649" r:id="R72227ac555db458a"/>
-    <p:sldLayoutId xmlns:r="http://schemas.openxmlformats.org/officeDocument/2006/relationships" id="2147483650" r:id="R0b53ec6a442b46f3"/>
-    <p:sldLayoutId xmlns:r="http://schemas.openxmlformats.org/officeDocument/2006/relationships" id="2147483651" r:id="R74b031b71c91407b"/>
-    <p:sldLayoutId xmlns:r="http://schemas.openxmlformats.org/officeDocument/2006/relationships" id="2147483652" r:id="Re7ba614e9c7f4163"/>
-    <p:sldLayoutId xmlns:r="http://schemas.openxmlformats.org/officeDocument/2006/relationships" id="2147483653" r:id="Rf0d4cb441231454d"/>
-    <p:sldLayoutId xmlns:r="http://schemas.openxmlformats.org/officeDocument/2006/relationships" id="2147483654" r:id="Rcc9073ec18a74269"/>
+    <p:sldLayoutId xmlns:r="http://schemas.openxmlformats.org/officeDocument/2006/relationships" id="2147483649" r:id="Rb2fe33cf98a8464c"/>
+    <p:sldLayoutId xmlns:r="http://schemas.openxmlformats.org/officeDocument/2006/relationships" id="2147483650" r:id="Rb6170d81f0884aa9"/>
+    <p:sldLayoutId xmlns:r="http://schemas.openxmlformats.org/officeDocument/2006/relationships" id="2147483651" r:id="R2012d3456729402f"/>
+    <p:sldLayoutId xmlns:r="http://schemas.openxmlformats.org/officeDocument/2006/relationships" id="2147483652" r:id="R74d98e9c28e647fe"/>
+    <p:sldLayoutId xmlns:r="http://schemas.openxmlformats.org/officeDocument/2006/relationships" id="2147483653" r:id="R95dc95bef3aa4eb1"/>
+    <p:sldLayoutId xmlns:r="http://schemas.openxmlformats.org/officeDocument/2006/relationships" id="2147483654" r:id="Rc27cd37e2dbd4225"/>
   </p:sldLayoutIdLst>
   <p:txStyles>
     <p:titleStyle>
@@ -2866,7 +2881,7 @@
           <p:cNvPr id="85" name="">
             <a:extLst xmlns:a="http://schemas.openxmlformats.org/drawingml/2006/main">
               <a:ext uri="{FF2B5EF4-FFF2-40B4-BE49-F238E27FC236}">
-                <a16:creationId xmlns:a16="http://schemas.microsoft.com/office/drawing/2014/main" id="{3D6D3642-6774-470C-960E-A4E586101F38}"/>
+                <a16:creationId xmlns:a16="http://schemas.microsoft.com/office/drawing/2014/main" id="{2044C1E1-3F86-4383-A1D7-2A52744B6654}"/>
               </a:ext>
             </a:extLst>
           </p:cNvPr>
@@ -2884,7 +2899,7 @@
             <a:avLst/>
           </a:prstGeom>
           <a:solidFill xmlns:a="http://schemas.openxmlformats.org/drawingml/2006/main">
-            <a:srgbClr val="007D80"/>
+            <a:srgbClr val="00355F"/>
           </a:solidFill>
           <a:ln xmlns:a="http://schemas.openxmlformats.org/drawingml/2006/main" w="9525">
             <a:noFill/>
@@ -2896,7 +2911,7 @@
           <p:cNvPr id="2" name="RSI: AI design and biological validation">
             <a:extLst xmlns:a="http://schemas.openxmlformats.org/drawingml/2006/main">
               <a:ext uri="{FF2B5EF4-FFF2-40B4-BE49-F238E27FC236}">
-                <a16:creationId xmlns:a16="http://schemas.microsoft.com/office/drawing/2014/main" id="{106A76A8-9C58-4E91-868E-8E99BA5B63EE}"/>
+                <a16:creationId xmlns:a16="http://schemas.microsoft.com/office/drawing/2014/main" id="{56FB287F-7F7E-4A18-9A0C-F216AE9DF67E}"/>
               </a:ext>
             </a:extLst>
           </p:cNvPr>
@@ -2924,7 +2939,7 @@
             <a:defPPr algn="l">
               <a:defRPr sz="4200" b="1">
                 <a:solidFill>
-                  <a:srgbClr val="152C3A"/>
+                  <a:srgbClr val="00355F"/>
                 </a:solidFill>
                 <a:latin typeface="Arial"/>
                 <a:ea typeface="Arial"/>
@@ -2940,7 +2955,7 @@
               <a:buNone/>
               <a:defRPr sz="4200" b="1">
                 <a:solidFill>
-                  <a:srgbClr val="152C3A"/>
+                  <a:srgbClr val="00355F"/>
                 </a:solidFill>
                 <a:latin typeface="Arial"/>
                 <a:ea typeface="Arial"/>
@@ -2950,7 +2965,7 @@
             <a:r>
               <a:rPr sz="4200" b="1">
                 <a:solidFill>
-                  <a:srgbClr val="152C3A"/>
+                  <a:srgbClr val="00355F"/>
                 </a:solidFill>
                 <a:latin typeface="Arial"/>
                 <a:ea typeface="Arial"/>
@@ -2966,7 +2981,7 @@
           <p:cNvPr id="3" name="How experimental feedback could improve both biological designs and the AI design process">
             <a:extLst xmlns:a="http://schemas.openxmlformats.org/drawingml/2006/main">
               <a:ext uri="{FF2B5EF4-FFF2-40B4-BE49-F238E27FC236}">
-                <a16:creationId xmlns:a16="http://schemas.microsoft.com/office/drawing/2014/main" id="{DD3DF8FF-2F9E-4AF2-99A6-22FBC35D7A5B}"/>
+                <a16:creationId xmlns:a16="http://schemas.microsoft.com/office/drawing/2014/main" id="{7367E109-D284-4131-8765-F34A9DBA86C2}"/>
               </a:ext>
             </a:extLst>
           </p:cNvPr>
@@ -2994,7 +3009,7 @@
             <a:defPPr algn="l">
               <a:defRPr sz="2175" b="0">
                 <a:solidFill>
-                  <a:srgbClr val="647887"/>
+                  <a:srgbClr val="00355F"/>
                 </a:solidFill>
                 <a:latin typeface="Arial"/>
                 <a:ea typeface="Arial"/>
@@ -3010,7 +3025,7 @@
               <a:buNone/>
               <a:defRPr sz="2175" b="0">
                 <a:solidFill>
-                  <a:srgbClr val="647887"/>
+                  <a:srgbClr val="00355F"/>
                 </a:solidFill>
                 <a:latin typeface="Arial"/>
                 <a:ea typeface="Arial"/>
@@ -3020,7 +3035,7 @@
             <a:r>
               <a:rPr sz="2175" b="0">
                 <a:solidFill>
-                  <a:srgbClr val="647887"/>
+                  <a:srgbClr val="00355F"/>
                 </a:solidFill>
                 <a:latin typeface="Arial"/>
                 <a:ea typeface="Arial"/>
@@ -3036,7 +3051,7 @@
           <p:cNvPr id="4" name="RECURSIVE SELF-IMPROVEMENT  ·  CONCEPTUAL MECHANISM">
             <a:extLst xmlns:a="http://schemas.openxmlformats.org/drawingml/2006/main">
               <a:ext uri="{FF2B5EF4-FFF2-40B4-BE49-F238E27FC236}">
-                <a16:creationId xmlns:a16="http://schemas.microsoft.com/office/drawing/2014/main" id="{FD79E213-8556-4D8C-903B-E6D4D1CB48B8}"/>
+                <a16:creationId xmlns:a16="http://schemas.microsoft.com/office/drawing/2014/main" id="{57D88F58-E222-4218-B066-C1B2EB1662CE}"/>
               </a:ext>
             </a:extLst>
           </p:cNvPr>
@@ -3064,7 +3079,7 @@
             <a:defPPr algn="l">
               <a:defRPr sz="1500" b="1">
                 <a:solidFill>
-                  <a:srgbClr val="007D80"/>
+                  <a:srgbClr val="00355F"/>
                 </a:solidFill>
                 <a:latin typeface="Arial"/>
                 <a:ea typeface="Arial"/>
@@ -3080,7 +3095,7 @@
               <a:buNone/>
               <a:defRPr sz="1500" b="1">
                 <a:solidFill>
-                  <a:srgbClr val="007D80"/>
+                  <a:srgbClr val="00355F"/>
                 </a:solidFill>
                 <a:latin typeface="Arial"/>
                 <a:ea typeface="Arial"/>
@@ -3090,7 +3105,7 @@
             <a:r>
               <a:rPr sz="1500" b="1">
                 <a:solidFill>
-                  <a:srgbClr val="007D80"/>
+                  <a:srgbClr val="00355F"/>
                 </a:solidFill>
                 <a:latin typeface="Arial"/>
                 <a:ea typeface="Arial"/>
@@ -3106,7 +3121,7 @@
           <p:cNvPr id="5" name="">
             <a:extLst xmlns:a="http://schemas.openxmlformats.org/drawingml/2006/main">
               <a:ext uri="{FF2B5EF4-FFF2-40B4-BE49-F238E27FC236}">
-                <a16:creationId xmlns:a16="http://schemas.microsoft.com/office/drawing/2014/main" id="{10785C44-BD7A-43CE-88CC-EC50D869244B}"/>
+                <a16:creationId xmlns:a16="http://schemas.microsoft.com/office/drawing/2014/main" id="{F0341F43-4705-4780-89CE-A92C19CA0D6D}"/>
               </a:ext>
             </a:extLst>
           </p:cNvPr>
@@ -3135,7 +3150,7 @@
           <a:noFill xmlns:a="http://schemas.openxmlformats.org/drawingml/2006/main"/>
           <a:ln xmlns:a="http://schemas.openxmlformats.org/drawingml/2006/main" w="9525">
             <a:solidFill>
-              <a:srgbClr val="D7E3E8"/>
+              <a:srgbClr val="A5A5A5"/>
             </a:solidFill>
           </a:ln>
         </p:spPr>
@@ -3145,7 +3160,7 @@
           <p:cNvPr id="6" name="">
             <a:extLst xmlns:a="http://schemas.openxmlformats.org/drawingml/2006/main">
               <a:ext uri="{FF2B5EF4-FFF2-40B4-BE49-F238E27FC236}">
-                <a16:creationId xmlns:a16="http://schemas.microsoft.com/office/drawing/2014/main" id="{E29398BE-2D49-401E-B732-A19052CA118C}"/>
+                <a16:creationId xmlns:a16="http://schemas.microsoft.com/office/drawing/2014/main" id="{0485D51E-FCC8-4F35-BD05-753F03FFBF0F}"/>
               </a:ext>
             </a:extLst>
           </p:cNvPr>
@@ -3165,11 +3180,11 @@
             </a:avLst>
           </a:prstGeom>
           <a:solidFill xmlns:a="http://schemas.openxmlformats.org/drawingml/2006/main">
-            <a:srgbClr val="EAF0FA"/>
+            <a:srgbClr val="EEF6FC"/>
           </a:solidFill>
           <a:ln xmlns:a="http://schemas.openxmlformats.org/drawingml/2006/main" w="9525">
             <a:solidFill>
-              <a:srgbClr val="BCD0E9"/>
+              <a:srgbClr val="7399C6"/>
             </a:solidFill>
           </a:ln>
         </p:spPr>
@@ -3179,7 +3194,7 @@
           <p:cNvPr id="7" name="">
             <a:extLst xmlns:a="http://schemas.openxmlformats.org/drawingml/2006/main">
               <a:ext uri="{FF2B5EF4-FFF2-40B4-BE49-F238E27FC236}">
-                <a16:creationId xmlns:a16="http://schemas.microsoft.com/office/drawing/2014/main" id="{CD64DFB5-6845-4022-A06E-66972189074D}"/>
+                <a16:creationId xmlns:a16="http://schemas.microsoft.com/office/drawing/2014/main" id="{9B3D518A-730B-4474-95B9-9023CE494726}"/>
               </a:ext>
             </a:extLst>
           </p:cNvPr>
@@ -3199,11 +3214,11 @@
             </a:avLst>
           </a:prstGeom>
           <a:solidFill xmlns:a="http://schemas.openxmlformats.org/drawingml/2006/main">
-            <a:srgbClr val="EAF6F4"/>
+            <a:srgbClr val="EEF6FC"/>
           </a:solidFill>
           <a:ln xmlns:a="http://schemas.openxmlformats.org/drawingml/2006/main" w="9525">
             <a:solidFill>
-              <a:srgbClr val="A4CEC7"/>
+              <a:srgbClr val="7399C6"/>
             </a:solidFill>
           </a:ln>
         </p:spPr>
@@ -3213,7 +3228,7 @@
           <p:cNvPr id="8" name="DIGITAL CAPABILITY">
             <a:extLst xmlns:a="http://schemas.openxmlformats.org/drawingml/2006/main">
               <a:ext uri="{FF2B5EF4-FFF2-40B4-BE49-F238E27FC236}">
-                <a16:creationId xmlns:a16="http://schemas.microsoft.com/office/drawing/2014/main" id="{F4262DCB-E2A1-4ACA-994B-F57059A0A894}"/>
+                <a16:creationId xmlns:a16="http://schemas.microsoft.com/office/drawing/2014/main" id="{BF7C4709-EB78-472F-863E-606499BF53F4}"/>
               </a:ext>
             </a:extLst>
           </p:cNvPr>
@@ -3241,7 +3256,7 @@
             <a:defPPr algn="l">
               <a:defRPr sz="1650" b="1">
                 <a:solidFill>
-                  <a:srgbClr val="2B62B1"/>
+                  <a:srgbClr val="00355F"/>
                 </a:solidFill>
                 <a:latin typeface="Arial"/>
                 <a:ea typeface="Arial"/>
@@ -3257,7 +3272,7 @@
               <a:buNone/>
               <a:defRPr sz="1650" b="1">
                 <a:solidFill>
-                  <a:srgbClr val="2B62B1"/>
+                  <a:srgbClr val="00355F"/>
                 </a:solidFill>
                 <a:latin typeface="Arial"/>
                 <a:ea typeface="Arial"/>
@@ -3267,7 +3282,7 @@
             <a:r>
               <a:rPr sz="1650" b="1">
                 <a:solidFill>
-                  <a:srgbClr val="2B62B1"/>
+                  <a:srgbClr val="00355F"/>
                 </a:solidFill>
                 <a:latin typeface="Arial"/>
                 <a:ea typeface="Arial"/>
@@ -3283,7 +3298,7 @@
           <p:cNvPr id="9" name="EXPERIMENTAL STRATEGY">
             <a:extLst xmlns:a="http://schemas.openxmlformats.org/drawingml/2006/main">
               <a:ext uri="{FF2B5EF4-FFF2-40B4-BE49-F238E27FC236}">
-                <a16:creationId xmlns:a16="http://schemas.microsoft.com/office/drawing/2014/main" id="{97BA6A97-1C9E-4F8F-97BE-0B05B54852A0}"/>
+                <a16:creationId xmlns:a16="http://schemas.microsoft.com/office/drawing/2014/main" id="{0DA30274-9684-47E6-B3E2-CCE5D16032A2}"/>
               </a:ext>
             </a:extLst>
           </p:cNvPr>
@@ -3311,7 +3326,7 @@
             <a:defPPr algn="l">
               <a:defRPr sz="1650" b="1">
                 <a:solidFill>
-                  <a:srgbClr val="647887"/>
+                  <a:srgbClr val="00355F"/>
                 </a:solidFill>
                 <a:latin typeface="Arial"/>
                 <a:ea typeface="Arial"/>
@@ -3327,7 +3342,7 @@
               <a:buNone/>
               <a:defRPr sz="1650" b="1">
                 <a:solidFill>
-                  <a:srgbClr val="647887"/>
+                  <a:srgbClr val="00355F"/>
                 </a:solidFill>
                 <a:latin typeface="Arial"/>
                 <a:ea typeface="Arial"/>
@@ -3337,7 +3352,7 @@
             <a:r>
               <a:rPr sz="1650" b="1">
                 <a:solidFill>
-                  <a:srgbClr val="647887"/>
+                  <a:srgbClr val="00355F"/>
                 </a:solidFill>
                 <a:latin typeface="Arial"/>
                 <a:ea typeface="Arial"/>
@@ -3353,7 +3368,7 @@
           <p:cNvPr id="10" name="PHYSICAL GROUNDING">
             <a:extLst xmlns:a="http://schemas.openxmlformats.org/drawingml/2006/main">
               <a:ext uri="{FF2B5EF4-FFF2-40B4-BE49-F238E27FC236}">
-                <a16:creationId xmlns:a16="http://schemas.microsoft.com/office/drawing/2014/main" id="{825C065B-71AC-4626-B088-92168754B426}"/>
+                <a16:creationId xmlns:a16="http://schemas.microsoft.com/office/drawing/2014/main" id="{6559E135-4D48-4FD5-A03A-DC297E2E9E9F}"/>
               </a:ext>
             </a:extLst>
           </p:cNvPr>
@@ -3381,7 +3396,7 @@
             <a:defPPr algn="l">
               <a:defRPr sz="1650" b="1">
                 <a:solidFill>
-                  <a:srgbClr val="007D80"/>
+                  <a:srgbClr val="00355F"/>
                 </a:solidFill>
                 <a:latin typeface="Arial"/>
                 <a:ea typeface="Arial"/>
@@ -3397,7 +3412,7 @@
               <a:buNone/>
               <a:defRPr sz="1650" b="1">
                 <a:solidFill>
-                  <a:srgbClr val="007D80"/>
+                  <a:srgbClr val="00355F"/>
                 </a:solidFill>
                 <a:latin typeface="Arial"/>
                 <a:ea typeface="Arial"/>
@@ -3407,7 +3422,7 @@
             <a:r>
               <a:rPr sz="1650" b="1">
                 <a:solidFill>
-                  <a:srgbClr val="007D80"/>
+                  <a:srgbClr val="00355F"/>
                 </a:solidFill>
                 <a:latin typeface="Arial"/>
                 <a:ea typeface="Arial"/>
@@ -3423,7 +3438,7 @@
           <p:cNvPr id="11" name="">
             <a:extLst xmlns:a="http://schemas.openxmlformats.org/drawingml/2006/main">
               <a:ext uri="{FF2B5EF4-FFF2-40B4-BE49-F238E27FC236}">
-                <a16:creationId xmlns:a16="http://schemas.microsoft.com/office/drawing/2014/main" id="{D36A1240-1556-42CE-A181-EC1D9963CB18}"/>
+                <a16:creationId xmlns:a16="http://schemas.microsoft.com/office/drawing/2014/main" id="{ADBF3F82-E38B-4A0A-9034-B5C245E191C3}"/>
               </a:ext>
             </a:extLst>
           </p:cNvPr>
@@ -3443,7 +3458,7 @@
             </a:avLst>
           </a:prstGeom>
           <a:solidFill xmlns:a="http://schemas.openxmlformats.org/drawingml/2006/main">
-            <a:srgbClr val="E7EEF1"/>
+            <a:srgbClr val="EEF6FC"/>
           </a:solidFill>
           <a:ln xmlns:a="http://schemas.openxmlformats.org/drawingml/2006/main" w="9525">
             <a:noFill/>
@@ -3455,7 +3470,7 @@
           <p:cNvPr id="12" name="">
             <a:extLst xmlns:a="http://schemas.openxmlformats.org/drawingml/2006/main">
               <a:ext uri="{FF2B5EF4-FFF2-40B4-BE49-F238E27FC236}">
-                <a16:creationId xmlns:a16="http://schemas.microsoft.com/office/drawing/2014/main" id="{3A0A4FA4-1889-4A5A-BAB5-64976DD36F2C}"/>
+                <a16:creationId xmlns:a16="http://schemas.microsoft.com/office/drawing/2014/main" id="{B2BC0426-BAFF-4713-A88A-D1E07A409C10}"/>
               </a:ext>
             </a:extLst>
           </p:cNvPr>
@@ -3479,7 +3494,7 @@
           </a:solidFill>
           <a:ln xmlns:a="http://schemas.openxmlformats.org/drawingml/2006/main" w="12383">
             <a:solidFill>
-              <a:srgbClr val="A7C2E2"/>
+              <a:srgbClr val="7399C6"/>
             </a:solidFill>
           </a:ln>
         </p:spPr>
@@ -3489,7 +3504,7 @@
           <p:cNvPr id="13" name="01  /  MODEL">
             <a:extLst xmlns:a="http://schemas.openxmlformats.org/drawingml/2006/main">
               <a:ext uri="{FF2B5EF4-FFF2-40B4-BE49-F238E27FC236}">
-                <a16:creationId xmlns:a16="http://schemas.microsoft.com/office/drawing/2014/main" id="{AAA07E80-34C9-4366-8F1E-FBFB9E6AE9C7}"/>
+                <a16:creationId xmlns:a16="http://schemas.microsoft.com/office/drawing/2014/main" id="{CE922E1D-6FB3-4FF5-AAFB-F70209B8BC92}"/>
               </a:ext>
             </a:extLst>
           </p:cNvPr>
@@ -3517,7 +3532,7 @@
             <a:defPPr algn="l">
               <a:defRPr sz="1388" b="1">
                 <a:solidFill>
-                  <a:srgbClr val="647887"/>
+                  <a:srgbClr val="00355F"/>
                 </a:solidFill>
                 <a:latin typeface="Arial"/>
                 <a:ea typeface="Arial"/>
@@ -3533,7 +3548,7 @@
               <a:buNone/>
               <a:defRPr sz="1388" b="1">
                 <a:solidFill>
-                  <a:srgbClr val="647887"/>
+                  <a:srgbClr val="00355F"/>
                 </a:solidFill>
                 <a:latin typeface="Arial"/>
                 <a:ea typeface="Arial"/>
@@ -3543,7 +3558,7 @@
             <a:r>
               <a:rPr sz="1388" b="1">
                 <a:solidFill>
-                  <a:srgbClr val="647887"/>
+                  <a:srgbClr val="00355F"/>
                 </a:solidFill>
                 <a:latin typeface="Arial"/>
                 <a:ea typeface="Arial"/>
@@ -3559,7 +3574,7 @@
           <p:cNvPr id="14" name="">
             <a:extLst xmlns:a="http://schemas.openxmlformats.org/drawingml/2006/main">
               <a:ext uri="{FF2B5EF4-FFF2-40B4-BE49-F238E27FC236}">
-                <a16:creationId xmlns:a16="http://schemas.microsoft.com/office/drawing/2014/main" id="{AB4465F2-1673-4AE5-9366-B7E7313B3B10}"/>
+                <a16:creationId xmlns:a16="http://schemas.microsoft.com/office/drawing/2014/main" id="{981EDE02-804D-4729-8669-7499D6C89934}"/>
               </a:ext>
             </a:extLst>
           </p:cNvPr>
@@ -3569,10 +3584,10 @@
           <p:nvPr/>
         </p:nvPicPr>
         <p:blipFill>
-          <a:blip xmlns:r="http://schemas.openxmlformats.org/officeDocument/2006/relationships" xmlns:a="http://schemas.openxmlformats.org/drawingml/2006/main" r:embed="R66a3f5982a5e48a5">
+          <a:blip xmlns:r="http://schemas.openxmlformats.org/officeDocument/2006/relationships" xmlns:a="http://schemas.openxmlformats.org/drawingml/2006/main" r:embed="Ra2079435218c417b">
             <a:extLst>
               <a:ext uri="{96DAC541-7B7A-43D3-8B79-37D633B846F1}">
-                <asvg:svgBlip xmlns:asvg="http://schemas.microsoft.com/office/drawing/2016/SVG/main" r:embed="Ra91bf75ec75e4eac"/>
+                <asvg:svgBlip xmlns:asvg="http://schemas.microsoft.com/office/drawing/2016/SVG/main" r:embed="R554ac493d3da4f29"/>
               </a:ext>
             </a:extLst>
           </a:blip>
@@ -3593,7 +3608,7 @@
           <p:cNvPr id="15" name="AI scientist · Model t">
             <a:extLst xmlns:a="http://schemas.openxmlformats.org/drawingml/2006/main">
               <a:ext uri="{FF2B5EF4-FFF2-40B4-BE49-F238E27FC236}">
-                <a16:creationId xmlns:a16="http://schemas.microsoft.com/office/drawing/2014/main" id="{39706BF4-ADBE-4FF4-B26C-076A3D58FDDD}"/>
+                <a16:creationId xmlns:a16="http://schemas.microsoft.com/office/drawing/2014/main" id="{D2B326C5-2D00-4FFA-B450-51930C405EBE}"/>
               </a:ext>
             </a:extLst>
           </p:cNvPr>
@@ -3621,7 +3636,7 @@
             <a:defPPr algn="l">
               <a:defRPr sz="2325" b="1">
                 <a:solidFill>
-                  <a:srgbClr val="152C3A"/>
+                  <a:srgbClr val="00355F"/>
                 </a:solidFill>
                 <a:latin typeface="Arial"/>
                 <a:ea typeface="Arial"/>
@@ -3637,7 +3652,7 @@
               <a:buNone/>
               <a:defRPr sz="2325" b="1">
                 <a:solidFill>
-                  <a:srgbClr val="152C3A"/>
+                  <a:srgbClr val="00355F"/>
                 </a:solidFill>
                 <a:latin typeface="Arial"/>
                 <a:ea typeface="Arial"/>
@@ -3647,7 +3662,7 @@
             <a:r>
               <a:rPr sz="2325" b="1">
                 <a:solidFill>
-                  <a:srgbClr val="152C3A"/>
+                  <a:srgbClr val="00355F"/>
                 </a:solidFill>
                 <a:latin typeface="Arial"/>
                 <a:ea typeface="Arial"/>
@@ -3663,7 +3678,7 @@
           <p:cNvPr id="16" name="Predict properties and uncertainty">
             <a:extLst xmlns:a="http://schemas.openxmlformats.org/drawingml/2006/main">
               <a:ext uri="{FF2B5EF4-FFF2-40B4-BE49-F238E27FC236}">
-                <a16:creationId xmlns:a16="http://schemas.microsoft.com/office/drawing/2014/main" id="{E62A991A-CB6D-45E7-AE28-986E1C8E8512}"/>
+                <a16:creationId xmlns:a16="http://schemas.microsoft.com/office/drawing/2014/main" id="{7EE3F34F-D8B9-4E72-B588-1593257D4535}"/>
               </a:ext>
             </a:extLst>
           </p:cNvPr>
@@ -3691,7 +3706,7 @@
             <a:defPPr algn="l">
               <a:defRPr sz="1688" b="0">
                 <a:solidFill>
-                  <a:srgbClr val="647887"/>
+                  <a:srgbClr val="00355F"/>
                 </a:solidFill>
                 <a:latin typeface="Arial"/>
                 <a:ea typeface="Arial"/>
@@ -3707,7 +3722,7 @@
               <a:buNone/>
               <a:defRPr sz="1688" b="0">
                 <a:solidFill>
-                  <a:srgbClr val="647887"/>
+                  <a:srgbClr val="00355F"/>
                 </a:solidFill>
                 <a:latin typeface="Arial"/>
                 <a:ea typeface="Arial"/>
@@ -3717,7 +3732,7 @@
             <a:r>
               <a:rPr sz="1688" b="0">
                 <a:solidFill>
-                  <a:srgbClr val="647887"/>
+                  <a:srgbClr val="00355F"/>
                 </a:solidFill>
                 <a:latin typeface="Arial"/>
                 <a:ea typeface="Arial"/>
@@ -3734,7 +3749,7 @@
               <a:buNone/>
               <a:defRPr sz="1688" b="0">
                 <a:solidFill>
-                  <a:srgbClr val="647887"/>
+                  <a:srgbClr val="00355F"/>
                 </a:solidFill>
                 <a:latin typeface="Arial"/>
                 <a:ea typeface="Arial"/>
@@ -3744,7 +3759,7 @@
             <a:r>
               <a:rPr sz="1688" b="0">
                 <a:solidFill>
-                  <a:srgbClr val="647887"/>
+                  <a:srgbClr val="00355F"/>
                 </a:solidFill>
                 <a:latin typeface="Arial"/>
                 <a:ea typeface="Arial"/>
@@ -3760,7 +3775,7 @@
           <p:cNvPr id="17" name="">
             <a:extLst xmlns:a="http://schemas.openxmlformats.org/drawingml/2006/main">
               <a:ext uri="{FF2B5EF4-FFF2-40B4-BE49-F238E27FC236}">
-                <a16:creationId xmlns:a16="http://schemas.microsoft.com/office/drawing/2014/main" id="{D93D5C57-4938-4835-8E2A-09917ACFEE71}"/>
+                <a16:creationId xmlns:a16="http://schemas.microsoft.com/office/drawing/2014/main" id="{44982853-7EF9-493A-ADAA-2FA9EE433DFE}"/>
               </a:ext>
             </a:extLst>
           </p:cNvPr>
@@ -3780,7 +3795,7 @@
             </a:avLst>
           </a:prstGeom>
           <a:solidFill xmlns:a="http://schemas.openxmlformats.org/drawingml/2006/main">
-            <a:srgbClr val="E7EEF1"/>
+            <a:srgbClr val="EEF6FC"/>
           </a:solidFill>
           <a:ln xmlns:a="http://schemas.openxmlformats.org/drawingml/2006/main" w="9525">
             <a:noFill/>
@@ -3792,7 +3807,7 @@
           <p:cNvPr id="18" name="">
             <a:extLst xmlns:a="http://schemas.openxmlformats.org/drawingml/2006/main">
               <a:ext uri="{FF2B5EF4-FFF2-40B4-BE49-F238E27FC236}">
-                <a16:creationId xmlns:a16="http://schemas.microsoft.com/office/drawing/2014/main" id="{E004FD49-91CE-4129-A2AB-54AF2E60D1BA}"/>
+                <a16:creationId xmlns:a16="http://schemas.microsoft.com/office/drawing/2014/main" id="{53EA7240-6721-498A-95F0-90BF54B25372}"/>
               </a:ext>
             </a:extLst>
           </p:cNvPr>
@@ -3816,7 +3831,7 @@
           </a:solidFill>
           <a:ln xmlns:a="http://schemas.openxmlformats.org/drawingml/2006/main" w="12383">
             <a:solidFill>
-              <a:srgbClr val="D7E3E8"/>
+              <a:srgbClr val="A5A5A5"/>
             </a:solidFill>
           </a:ln>
         </p:spPr>
@@ -3826,7 +3841,7 @@
           <p:cNvPr id="19" name="02  /  DESIGN">
             <a:extLst xmlns:a="http://schemas.openxmlformats.org/drawingml/2006/main">
               <a:ext uri="{FF2B5EF4-FFF2-40B4-BE49-F238E27FC236}">
-                <a16:creationId xmlns:a16="http://schemas.microsoft.com/office/drawing/2014/main" id="{CC477EB2-EBB0-49A1-AAE4-DA345CF029F2}"/>
+                <a16:creationId xmlns:a16="http://schemas.microsoft.com/office/drawing/2014/main" id="{6E974951-FB31-4828-B835-0D41643627F5}"/>
               </a:ext>
             </a:extLst>
           </p:cNvPr>
@@ -3854,7 +3869,7 @@
             <a:defPPr algn="l">
               <a:defRPr sz="1388" b="1">
                 <a:solidFill>
-                  <a:srgbClr val="647887"/>
+                  <a:srgbClr val="00355F"/>
                 </a:solidFill>
                 <a:latin typeface="Arial"/>
                 <a:ea typeface="Arial"/>
@@ -3870,7 +3885,7 @@
               <a:buNone/>
               <a:defRPr sz="1388" b="1">
                 <a:solidFill>
-                  <a:srgbClr val="647887"/>
+                  <a:srgbClr val="00355F"/>
                 </a:solidFill>
                 <a:latin typeface="Arial"/>
                 <a:ea typeface="Arial"/>
@@ -3880,7 +3895,7 @@
             <a:r>
               <a:rPr sz="1388" b="1">
                 <a:solidFill>
-                  <a:srgbClr val="647887"/>
+                  <a:srgbClr val="00355F"/>
                 </a:solidFill>
                 <a:latin typeface="Arial"/>
                 <a:ea typeface="Arial"/>
@@ -3896,7 +3911,7 @@
           <p:cNvPr id="20" name="">
             <a:extLst xmlns:a="http://schemas.openxmlformats.org/drawingml/2006/main">
               <a:ext uri="{FF2B5EF4-FFF2-40B4-BE49-F238E27FC236}">
-                <a16:creationId xmlns:a16="http://schemas.microsoft.com/office/drawing/2014/main" id="{A128C3A8-63BF-4ED1-A8D5-1B71301D37C4}"/>
+                <a16:creationId xmlns:a16="http://schemas.microsoft.com/office/drawing/2014/main" id="{F3CD14BA-CDE8-458B-84C2-0BB44118FF2F}"/>
               </a:ext>
             </a:extLst>
           </p:cNvPr>
@@ -3906,10 +3921,10 @@
           <p:nvPr/>
         </p:nvPicPr>
         <p:blipFill>
-          <a:blip xmlns:r="http://schemas.openxmlformats.org/officeDocument/2006/relationships" xmlns:a="http://schemas.openxmlformats.org/drawingml/2006/main" r:embed="Rc5dfdf716420461f">
+          <a:blip xmlns:r="http://schemas.openxmlformats.org/officeDocument/2006/relationships" xmlns:a="http://schemas.openxmlformats.org/drawingml/2006/main" r:embed="Ra9e89ac7a9c44aa9">
             <a:extLst>
               <a:ext uri="{96DAC541-7B7A-43D3-8B79-37D633B846F1}">
-                <asvg:svgBlip xmlns:asvg="http://schemas.microsoft.com/office/drawing/2016/SVG/main" r:embed="Rec1608ab1ce04261"/>
+                <asvg:svgBlip xmlns:asvg="http://schemas.microsoft.com/office/drawing/2016/SVG/main" r:embed="R488a9a0685d44c30"/>
               </a:ext>
             </a:extLst>
           </a:blip>
@@ -3930,7 +3945,7 @@
           <p:cNvPr id="21" name="Design &amp; prioritize">
             <a:extLst xmlns:a="http://schemas.openxmlformats.org/drawingml/2006/main">
               <a:ext uri="{FF2B5EF4-FFF2-40B4-BE49-F238E27FC236}">
-                <a16:creationId xmlns:a16="http://schemas.microsoft.com/office/drawing/2014/main" id="{53649500-3ECC-41F6-96F8-06E3DFACC01B}"/>
+                <a16:creationId xmlns:a16="http://schemas.microsoft.com/office/drawing/2014/main" id="{E4854EE5-D760-478F-B387-6DDE4E70CB58}"/>
               </a:ext>
             </a:extLst>
           </p:cNvPr>
@@ -3958,7 +3973,7 @@
             <a:defPPr algn="l">
               <a:defRPr sz="2325" b="1">
                 <a:solidFill>
-                  <a:srgbClr val="152C3A"/>
+                  <a:srgbClr val="00355F"/>
                 </a:solidFill>
                 <a:latin typeface="Arial"/>
                 <a:ea typeface="Arial"/>
@@ -3974,7 +3989,7 @@
               <a:buNone/>
               <a:defRPr sz="2325" b="1">
                 <a:solidFill>
-                  <a:srgbClr val="152C3A"/>
+                  <a:srgbClr val="00355F"/>
                 </a:solidFill>
                 <a:latin typeface="Arial"/>
                 <a:ea typeface="Arial"/>
@@ -3984,7 +3999,7 @@
             <a:r>
               <a:rPr sz="2325" b="1">
                 <a:solidFill>
-                  <a:srgbClr val="152C3A"/>
+                  <a:srgbClr val="00355F"/>
                 </a:solidFill>
                 <a:latin typeface="Arial"/>
                 <a:ea typeface="Arial"/>
@@ -4000,7 +4015,7 @@
           <p:cNvPr id="22" name="Choose candidates and assays">
             <a:extLst xmlns:a="http://schemas.openxmlformats.org/drawingml/2006/main">
               <a:ext uri="{FF2B5EF4-FFF2-40B4-BE49-F238E27FC236}">
-                <a16:creationId xmlns:a16="http://schemas.microsoft.com/office/drawing/2014/main" id="{EAE90EF7-CECC-4E9C-97A8-443E3C56DEAA}"/>
+                <a16:creationId xmlns:a16="http://schemas.microsoft.com/office/drawing/2014/main" id="{FD2FD548-66BD-47D8-BE4D-6AF997EC43CE}"/>
               </a:ext>
             </a:extLst>
           </p:cNvPr>
@@ -4028,7 +4043,7 @@
             <a:defPPr algn="l">
               <a:defRPr sz="1688" b="0">
                 <a:solidFill>
-                  <a:srgbClr val="647887"/>
+                  <a:srgbClr val="00355F"/>
                 </a:solidFill>
                 <a:latin typeface="Arial"/>
                 <a:ea typeface="Arial"/>
@@ -4044,7 +4059,7 @@
               <a:buNone/>
               <a:defRPr sz="1688" b="0">
                 <a:solidFill>
-                  <a:srgbClr val="647887"/>
+                  <a:srgbClr val="00355F"/>
                 </a:solidFill>
                 <a:latin typeface="Arial"/>
                 <a:ea typeface="Arial"/>
@@ -4054,7 +4069,7 @@
             <a:r>
               <a:rPr sz="1688" b="0">
                 <a:solidFill>
-                  <a:srgbClr val="647887"/>
+                  <a:srgbClr val="00355F"/>
                 </a:solidFill>
                 <a:latin typeface="Arial"/>
                 <a:ea typeface="Arial"/>
@@ -4071,7 +4086,7 @@
               <a:buNone/>
               <a:defRPr sz="1688" b="0">
                 <a:solidFill>
-                  <a:srgbClr val="647887"/>
+                  <a:srgbClr val="00355F"/>
                 </a:solidFill>
                 <a:latin typeface="Arial"/>
                 <a:ea typeface="Arial"/>
@@ -4081,7 +4096,7 @@
             <a:r>
               <a:rPr sz="1688" b="0">
                 <a:solidFill>
-                  <a:srgbClr val="647887"/>
+                  <a:srgbClr val="00355F"/>
                 </a:solidFill>
                 <a:latin typeface="Arial"/>
                 <a:ea typeface="Arial"/>
@@ -4097,7 +4112,7 @@
           <p:cNvPr id="23" name="">
             <a:extLst xmlns:a="http://schemas.openxmlformats.org/drawingml/2006/main">
               <a:ext uri="{FF2B5EF4-FFF2-40B4-BE49-F238E27FC236}">
-                <a16:creationId xmlns:a16="http://schemas.microsoft.com/office/drawing/2014/main" id="{4DACFBB7-46C1-44DC-BDD0-016B3A5247A1}"/>
+                <a16:creationId xmlns:a16="http://schemas.microsoft.com/office/drawing/2014/main" id="{411E6A5F-0E27-43DD-A002-6DF43303AF92}"/>
               </a:ext>
             </a:extLst>
           </p:cNvPr>
@@ -4117,7 +4132,7 @@
             </a:avLst>
           </a:prstGeom>
           <a:solidFill xmlns:a="http://schemas.openxmlformats.org/drawingml/2006/main">
-            <a:srgbClr val="E7EEF1"/>
+            <a:srgbClr val="EEF6FC"/>
           </a:solidFill>
           <a:ln xmlns:a="http://schemas.openxmlformats.org/drawingml/2006/main" w="9525">
             <a:noFill/>
@@ -4129,7 +4144,7 @@
           <p:cNvPr id="24" name="">
             <a:extLst xmlns:a="http://schemas.openxmlformats.org/drawingml/2006/main">
               <a:ext uri="{FF2B5EF4-FFF2-40B4-BE49-F238E27FC236}">
-                <a16:creationId xmlns:a16="http://schemas.microsoft.com/office/drawing/2014/main" id="{48BE30B3-82B0-471D-80FA-E1A29D8F9FDE}"/>
+                <a16:creationId xmlns:a16="http://schemas.microsoft.com/office/drawing/2014/main" id="{9436E1B5-7481-41D3-9D39-02DA029083E1}"/>
               </a:ext>
             </a:extLst>
           </p:cNvPr>
@@ -4153,7 +4168,7 @@
           </a:solidFill>
           <a:ln xmlns:a="http://schemas.openxmlformats.org/drawingml/2006/main" w="12383">
             <a:solidFill>
-              <a:srgbClr val="75B4A9"/>
+              <a:srgbClr val="7399C6"/>
             </a:solidFill>
           </a:ln>
         </p:spPr>
@@ -4163,7 +4178,7 @@
           <p:cNvPr id="25" name="03  /  BUILD">
             <a:extLst xmlns:a="http://schemas.openxmlformats.org/drawingml/2006/main">
               <a:ext uri="{FF2B5EF4-FFF2-40B4-BE49-F238E27FC236}">
-                <a16:creationId xmlns:a16="http://schemas.microsoft.com/office/drawing/2014/main" id="{47CD90D9-B1D3-4270-A535-88A014F8E78D}"/>
+                <a16:creationId xmlns:a16="http://schemas.microsoft.com/office/drawing/2014/main" id="{1B816523-995D-4BC5-9EE2-53B49EE66861}"/>
               </a:ext>
             </a:extLst>
           </p:cNvPr>
@@ -4191,7 +4206,7 @@
             <a:defPPr algn="l">
               <a:defRPr sz="1388" b="1">
                 <a:solidFill>
-                  <a:srgbClr val="647887"/>
+                  <a:srgbClr val="00355F"/>
                 </a:solidFill>
                 <a:latin typeface="Arial"/>
                 <a:ea typeface="Arial"/>
@@ -4207,7 +4222,7 @@
               <a:buNone/>
               <a:defRPr sz="1388" b="1">
                 <a:solidFill>
-                  <a:srgbClr val="647887"/>
+                  <a:srgbClr val="00355F"/>
                 </a:solidFill>
                 <a:latin typeface="Arial"/>
                 <a:ea typeface="Arial"/>
@@ -4217,7 +4232,7 @@
             <a:r>
               <a:rPr sz="1388" b="1">
                 <a:solidFill>
-                  <a:srgbClr val="647887"/>
+                  <a:srgbClr val="00355F"/>
                 </a:solidFill>
                 <a:latin typeface="Arial"/>
                 <a:ea typeface="Arial"/>
@@ -4233,7 +4248,7 @@
           <p:cNvPr id="26" name="">
             <a:extLst xmlns:a="http://schemas.openxmlformats.org/drawingml/2006/main">
               <a:ext uri="{FF2B5EF4-FFF2-40B4-BE49-F238E27FC236}">
-                <a16:creationId xmlns:a16="http://schemas.microsoft.com/office/drawing/2014/main" id="{91A527EB-CA93-4441-8F27-D4AD13E04A66}"/>
+                <a16:creationId xmlns:a16="http://schemas.microsoft.com/office/drawing/2014/main" id="{3B050382-C148-4348-BF09-C3B7A465D169}"/>
               </a:ext>
             </a:extLst>
           </p:cNvPr>
@@ -4243,10 +4258,10 @@
           <p:nvPr/>
         </p:nvPicPr>
         <p:blipFill>
-          <a:blip xmlns:r="http://schemas.openxmlformats.org/officeDocument/2006/relationships" xmlns:a="http://schemas.openxmlformats.org/drawingml/2006/main" r:embed="Rf89505eb36154f27">
+          <a:blip xmlns:r="http://schemas.openxmlformats.org/officeDocument/2006/relationships" xmlns:a="http://schemas.openxmlformats.org/drawingml/2006/main" r:embed="R1a8eab98cffa4109">
             <a:extLst>
               <a:ext uri="{96DAC541-7B7A-43D3-8B79-37D633B846F1}">
-                <asvg:svgBlip xmlns:asvg="http://schemas.microsoft.com/office/drawing/2016/SVG/main" r:embed="Rec1ec49a7ead45d1"/>
+                <asvg:svgBlip xmlns:asvg="http://schemas.microsoft.com/office/drawing/2016/SVG/main" r:embed="Rdf40c56da5344dcc"/>
               </a:ext>
             </a:extLst>
           </a:blip>
@@ -4267,7 +4282,7 @@
           <p:cNvPr id="27" name="Build physical molecules">
             <a:extLst xmlns:a="http://schemas.openxmlformats.org/drawingml/2006/main">
               <a:ext uri="{FF2B5EF4-FFF2-40B4-BE49-F238E27FC236}">
-                <a16:creationId xmlns:a16="http://schemas.microsoft.com/office/drawing/2014/main" id="{24BB66E9-9916-4E7C-9E1E-C789BFA597B5}"/>
+                <a16:creationId xmlns:a16="http://schemas.microsoft.com/office/drawing/2014/main" id="{861469D0-EE7D-4130-A68B-2CFDA6E20D9C}"/>
               </a:ext>
             </a:extLst>
           </p:cNvPr>
@@ -4295,7 +4310,7 @@
             <a:defPPr algn="l">
               <a:defRPr sz="2325" b="1">
                 <a:solidFill>
-                  <a:srgbClr val="152C3A"/>
+                  <a:srgbClr val="00355F"/>
                 </a:solidFill>
                 <a:latin typeface="Arial"/>
                 <a:ea typeface="Arial"/>
@@ -4311,7 +4326,7 @@
               <a:buNone/>
               <a:defRPr sz="2325" b="1">
                 <a:solidFill>
-                  <a:srgbClr val="152C3A"/>
+                  <a:srgbClr val="00355F"/>
                 </a:solidFill>
                 <a:latin typeface="Arial"/>
                 <a:ea typeface="Arial"/>
@@ -4321,7 +4336,7 @@
             <a:r>
               <a:rPr sz="2325" b="1">
                 <a:solidFill>
-                  <a:srgbClr val="152C3A"/>
+                  <a:srgbClr val="00355F"/>
                 </a:solidFill>
                 <a:latin typeface="Arial"/>
                 <a:ea typeface="Arial"/>
@@ -4337,7 +4352,7 @@
           <p:cNvPr id="28" name="DNA synthesis, expression, purification">
             <a:extLst xmlns:a="http://schemas.openxmlformats.org/drawingml/2006/main">
               <a:ext uri="{FF2B5EF4-FFF2-40B4-BE49-F238E27FC236}">
-                <a16:creationId xmlns:a16="http://schemas.microsoft.com/office/drawing/2014/main" id="{D7C1F281-FAA2-4EB3-ACFF-AD869977CF1B}"/>
+                <a16:creationId xmlns:a16="http://schemas.microsoft.com/office/drawing/2014/main" id="{16761710-5ADA-4412-AEF8-5DDE013B6649}"/>
               </a:ext>
             </a:extLst>
           </p:cNvPr>
@@ -4365,7 +4380,7 @@
             <a:defPPr algn="l">
               <a:defRPr sz="1688" b="0">
                 <a:solidFill>
-                  <a:srgbClr val="647887"/>
+                  <a:srgbClr val="00355F"/>
                 </a:solidFill>
                 <a:latin typeface="Arial"/>
                 <a:ea typeface="Arial"/>
@@ -4381,7 +4396,7 @@
               <a:buNone/>
               <a:defRPr sz="1688" b="0">
                 <a:solidFill>
-                  <a:srgbClr val="647887"/>
+                  <a:srgbClr val="00355F"/>
                 </a:solidFill>
                 <a:latin typeface="Arial"/>
                 <a:ea typeface="Arial"/>
@@ -4391,7 +4406,7 @@
             <a:r>
               <a:rPr sz="1688" b="0">
                 <a:solidFill>
-                  <a:srgbClr val="647887"/>
+                  <a:srgbClr val="00355F"/>
                 </a:solidFill>
                 <a:latin typeface="Arial"/>
                 <a:ea typeface="Arial"/>
@@ -4408,7 +4423,7 @@
               <a:buNone/>
               <a:defRPr sz="1688" b="0">
                 <a:solidFill>
-                  <a:srgbClr val="647887"/>
+                  <a:srgbClr val="00355F"/>
                 </a:solidFill>
                 <a:latin typeface="Arial"/>
                 <a:ea typeface="Arial"/>
@@ -4418,7 +4433,7 @@
             <a:r>
               <a:rPr sz="1688" b="0">
                 <a:solidFill>
-                  <a:srgbClr val="647887"/>
+                  <a:srgbClr val="00355F"/>
                 </a:solidFill>
                 <a:latin typeface="Arial"/>
                 <a:ea typeface="Arial"/>
@@ -4434,7 +4449,7 @@
           <p:cNvPr id="29" name="">
             <a:extLst xmlns:a="http://schemas.openxmlformats.org/drawingml/2006/main">
               <a:ext uri="{FF2B5EF4-FFF2-40B4-BE49-F238E27FC236}">
-                <a16:creationId xmlns:a16="http://schemas.microsoft.com/office/drawing/2014/main" id="{9E508F2A-956D-408C-BB26-1B480D86BE23}"/>
+                <a16:creationId xmlns:a16="http://schemas.microsoft.com/office/drawing/2014/main" id="{0B046289-26BE-44A1-82C2-07D9660C1809}"/>
               </a:ext>
             </a:extLst>
           </p:cNvPr>
@@ -4454,7 +4469,7 @@
             </a:avLst>
           </a:prstGeom>
           <a:solidFill xmlns:a="http://schemas.openxmlformats.org/drawingml/2006/main">
-            <a:srgbClr val="E7EEF1"/>
+            <a:srgbClr val="EEF6FC"/>
           </a:solidFill>
           <a:ln xmlns:a="http://schemas.openxmlformats.org/drawingml/2006/main" w="9525">
             <a:noFill/>
@@ -4466,7 +4481,7 @@
           <p:cNvPr id="30" name="">
             <a:extLst xmlns:a="http://schemas.openxmlformats.org/drawingml/2006/main">
               <a:ext uri="{FF2B5EF4-FFF2-40B4-BE49-F238E27FC236}">
-                <a16:creationId xmlns:a16="http://schemas.microsoft.com/office/drawing/2014/main" id="{91FE05D8-7111-4379-B71C-6D6A27F29152}"/>
+                <a16:creationId xmlns:a16="http://schemas.microsoft.com/office/drawing/2014/main" id="{DF645B58-C7D9-4633-96C8-B36038C7CE33}"/>
               </a:ext>
             </a:extLst>
           </p:cNvPr>
@@ -4490,7 +4505,7 @@
           </a:solidFill>
           <a:ln xmlns:a="http://schemas.openxmlformats.org/drawingml/2006/main" w="12383">
             <a:solidFill>
-              <a:srgbClr val="75B4A9"/>
+              <a:srgbClr val="7399C6"/>
             </a:solidFill>
           </a:ln>
         </p:spPr>
@@ -4500,7 +4515,7 @@
           <p:cNvPr id="31" name="04  /  TEST">
             <a:extLst xmlns:a="http://schemas.openxmlformats.org/drawingml/2006/main">
               <a:ext uri="{FF2B5EF4-FFF2-40B4-BE49-F238E27FC236}">
-                <a16:creationId xmlns:a16="http://schemas.microsoft.com/office/drawing/2014/main" id="{63CEDC2E-39D0-4840-80FA-3164EED9016F}"/>
+                <a16:creationId xmlns:a16="http://schemas.microsoft.com/office/drawing/2014/main" id="{87E05D51-14B1-4321-8B5A-B9B9F2898A38}"/>
               </a:ext>
             </a:extLst>
           </p:cNvPr>
@@ -4528,7 +4543,7 @@
             <a:defPPr algn="l">
               <a:defRPr sz="1388" b="1">
                 <a:solidFill>
-                  <a:srgbClr val="647887"/>
+                  <a:srgbClr val="00355F"/>
                 </a:solidFill>
                 <a:latin typeface="Arial"/>
                 <a:ea typeface="Arial"/>
@@ -4544,7 +4559,7 @@
               <a:buNone/>
               <a:defRPr sz="1388" b="1">
                 <a:solidFill>
-                  <a:srgbClr val="647887"/>
+                  <a:srgbClr val="00355F"/>
                 </a:solidFill>
                 <a:latin typeface="Arial"/>
                 <a:ea typeface="Arial"/>
@@ -4554,7 +4569,7 @@
             <a:r>
               <a:rPr sz="1388" b="1">
                 <a:solidFill>
-                  <a:srgbClr val="647887"/>
+                  <a:srgbClr val="00355F"/>
                 </a:solidFill>
                 <a:latin typeface="Arial"/>
                 <a:ea typeface="Arial"/>
@@ -4570,7 +4585,7 @@
           <p:cNvPr id="32" name="">
             <a:extLst xmlns:a="http://schemas.openxmlformats.org/drawingml/2006/main">
               <a:ext uri="{FF2B5EF4-FFF2-40B4-BE49-F238E27FC236}">
-                <a16:creationId xmlns:a16="http://schemas.microsoft.com/office/drawing/2014/main" id="{464E2146-F960-458B-960D-7AAF464D32A1}"/>
+                <a16:creationId xmlns:a16="http://schemas.microsoft.com/office/drawing/2014/main" id="{FC6E5E4E-D083-4FAB-A49A-47189F472586}"/>
               </a:ext>
             </a:extLst>
           </p:cNvPr>
@@ -4580,10 +4595,10 @@
           <p:nvPr/>
         </p:nvPicPr>
         <p:blipFill>
-          <a:blip xmlns:r="http://schemas.openxmlformats.org/officeDocument/2006/relationships" xmlns:a="http://schemas.openxmlformats.org/drawingml/2006/main" r:embed="R35f2a62738464fb3">
+          <a:blip xmlns:r="http://schemas.openxmlformats.org/officeDocument/2006/relationships" xmlns:a="http://schemas.openxmlformats.org/drawingml/2006/main" r:embed="R6b7a991b330e4371">
             <a:extLst>
               <a:ext uri="{96DAC541-7B7A-43D3-8B79-37D633B846F1}">
-                <asvg:svgBlip xmlns:asvg="http://schemas.microsoft.com/office/drawing/2016/SVG/main" r:embed="R7b3507bdbac8468f"/>
+                <asvg:svgBlip xmlns:asvg="http://schemas.microsoft.com/office/drawing/2016/SVG/main" r:embed="R57933e1516874ebc"/>
               </a:ext>
             </a:extLst>
           </a:blip>
@@ -4604,7 +4619,7 @@
           <p:cNvPr id="33" name="Validate in biology">
             <a:extLst xmlns:a="http://schemas.openxmlformats.org/drawingml/2006/main">
               <a:ext uri="{FF2B5EF4-FFF2-40B4-BE49-F238E27FC236}">
-                <a16:creationId xmlns:a16="http://schemas.microsoft.com/office/drawing/2014/main" id="{626D133F-4B5A-4ED7-8176-A70A23EE16A3}"/>
+                <a16:creationId xmlns:a16="http://schemas.microsoft.com/office/drawing/2014/main" id="{2891DCFC-DA52-4227-B8A6-C28DF5EAD760}"/>
               </a:ext>
             </a:extLst>
           </p:cNvPr>
@@ -4632,7 +4647,7 @@
             <a:defPPr algn="l">
               <a:defRPr sz="2325" b="1">
                 <a:solidFill>
-                  <a:srgbClr val="152C3A"/>
+                  <a:srgbClr val="00355F"/>
                 </a:solidFill>
                 <a:latin typeface="Arial"/>
                 <a:ea typeface="Arial"/>
@@ -4648,7 +4663,7 @@
               <a:buNone/>
               <a:defRPr sz="2325" b="1">
                 <a:solidFill>
-                  <a:srgbClr val="152C3A"/>
+                  <a:srgbClr val="00355F"/>
                 </a:solidFill>
                 <a:latin typeface="Arial"/>
                 <a:ea typeface="Arial"/>
@@ -4658,7 +4673,7 @@
             <a:r>
               <a:rPr sz="2325" b="1">
                 <a:solidFill>
-                  <a:srgbClr val="152C3A"/>
+                  <a:srgbClr val="00355F"/>
                 </a:solidFill>
                 <a:latin typeface="Arial"/>
                 <a:ea typeface="Arial"/>
@@ -4674,7 +4689,7 @@
           <p:cNvPr id="34" name="Binding, stability and cell function">
             <a:extLst xmlns:a="http://schemas.openxmlformats.org/drawingml/2006/main">
               <a:ext uri="{FF2B5EF4-FFF2-40B4-BE49-F238E27FC236}">
-                <a16:creationId xmlns:a16="http://schemas.microsoft.com/office/drawing/2014/main" id="{002EC6DD-EFC7-4EB2-ACB0-70588B453564}"/>
+                <a16:creationId xmlns:a16="http://schemas.microsoft.com/office/drawing/2014/main" id="{60E3A930-B3C6-4986-91D5-7113368398CC}"/>
               </a:ext>
             </a:extLst>
           </p:cNvPr>
@@ -4702,7 +4717,7 @@
             <a:defPPr algn="l">
               <a:defRPr sz="1688" b="0">
                 <a:solidFill>
-                  <a:srgbClr val="647887"/>
+                  <a:srgbClr val="00355F"/>
                 </a:solidFill>
                 <a:latin typeface="Arial"/>
                 <a:ea typeface="Arial"/>
@@ -4718,7 +4733,7 @@
               <a:buNone/>
               <a:defRPr sz="1688" b="0">
                 <a:solidFill>
-                  <a:srgbClr val="647887"/>
+                  <a:srgbClr val="00355F"/>
                 </a:solidFill>
                 <a:latin typeface="Arial"/>
                 <a:ea typeface="Arial"/>
@@ -4728,7 +4743,7 @@
             <a:r>
               <a:rPr sz="1688" b="0">
                 <a:solidFill>
-                  <a:srgbClr val="647887"/>
+                  <a:srgbClr val="00355F"/>
                 </a:solidFill>
                 <a:latin typeface="Arial"/>
                 <a:ea typeface="Arial"/>
@@ -4745,7 +4760,7 @@
               <a:buNone/>
               <a:defRPr sz="1688" b="0">
                 <a:solidFill>
-                  <a:srgbClr val="647887"/>
+                  <a:srgbClr val="00355F"/>
                 </a:solidFill>
                 <a:latin typeface="Arial"/>
                 <a:ea typeface="Arial"/>
@@ -4755,7 +4770,7 @@
             <a:r>
               <a:rPr sz="1688" b="0">
                 <a:solidFill>
-                  <a:srgbClr val="647887"/>
+                  <a:srgbClr val="00355F"/>
                 </a:solidFill>
                 <a:latin typeface="Arial"/>
                 <a:ea typeface="Arial"/>
@@ -4771,7 +4786,7 @@
           <p:cNvPr id="35" name="">
             <a:extLst xmlns:a="http://schemas.openxmlformats.org/drawingml/2006/main">
               <a:ext uri="{FF2B5EF4-FFF2-40B4-BE49-F238E27FC236}">
-                <a16:creationId xmlns:a16="http://schemas.microsoft.com/office/drawing/2014/main" id="{9849C31C-6C8A-45C7-BFAC-27C6BF28699B}"/>
+                <a16:creationId xmlns:a16="http://schemas.microsoft.com/office/drawing/2014/main" id="{10F6DB26-D871-4F0B-864F-3DBAE0E82CB5}"/>
               </a:ext>
             </a:extLst>
           </p:cNvPr>
@@ -4791,7 +4806,7 @@
             </a:avLst>
           </a:prstGeom>
           <a:solidFill xmlns:a="http://schemas.openxmlformats.org/drawingml/2006/main">
-            <a:srgbClr val="E7EEF1"/>
+            <a:srgbClr val="EEF6FC"/>
           </a:solidFill>
           <a:ln xmlns:a="http://schemas.openxmlformats.org/drawingml/2006/main" w="9525">
             <a:noFill/>
@@ -4803,7 +4818,7 @@
           <p:cNvPr id="36" name="">
             <a:extLst xmlns:a="http://schemas.openxmlformats.org/drawingml/2006/main">
               <a:ext uri="{FF2B5EF4-FFF2-40B4-BE49-F238E27FC236}">
-                <a16:creationId xmlns:a16="http://schemas.microsoft.com/office/drawing/2014/main" id="{E112B83E-9F19-49C3-BAA7-48625ED0FE15}"/>
+                <a16:creationId xmlns:a16="http://schemas.microsoft.com/office/drawing/2014/main" id="{A217164E-3418-4228-A563-B808A01A4CE4}"/>
               </a:ext>
             </a:extLst>
           </p:cNvPr>
@@ -4827,7 +4842,7 @@
           </a:solidFill>
           <a:ln xmlns:a="http://schemas.openxmlformats.org/drawingml/2006/main" w="12383">
             <a:solidFill>
-              <a:srgbClr val="D7E3E8"/>
+              <a:srgbClr val="A5A5A5"/>
             </a:solidFill>
           </a:ln>
         </p:spPr>
@@ -4837,7 +4852,7 @@
           <p:cNvPr id="37" name="05  /  DATA">
             <a:extLst xmlns:a="http://schemas.openxmlformats.org/drawingml/2006/main">
               <a:ext uri="{FF2B5EF4-FFF2-40B4-BE49-F238E27FC236}">
-                <a16:creationId xmlns:a16="http://schemas.microsoft.com/office/drawing/2014/main" id="{CE82F96C-F170-47B5-A8BC-36ACB2EE067D}"/>
+                <a16:creationId xmlns:a16="http://schemas.microsoft.com/office/drawing/2014/main" id="{E21A0A65-942E-41E1-8037-4173390D6642}"/>
               </a:ext>
             </a:extLst>
           </p:cNvPr>
@@ -4865,7 +4880,7 @@
             <a:defPPr algn="l">
               <a:defRPr sz="1388" b="1">
                 <a:solidFill>
-                  <a:srgbClr val="647887"/>
+                  <a:srgbClr val="00355F"/>
                 </a:solidFill>
                 <a:latin typeface="Arial"/>
                 <a:ea typeface="Arial"/>
@@ -4881,7 +4896,7 @@
               <a:buNone/>
               <a:defRPr sz="1388" b="1">
                 <a:solidFill>
-                  <a:srgbClr val="647887"/>
+                  <a:srgbClr val="00355F"/>
                 </a:solidFill>
                 <a:latin typeface="Arial"/>
                 <a:ea typeface="Arial"/>
@@ -4891,7 +4906,7 @@
             <a:r>
               <a:rPr sz="1388" b="1">
                 <a:solidFill>
-                  <a:srgbClr val="647887"/>
+                  <a:srgbClr val="00355F"/>
                 </a:solidFill>
                 <a:latin typeface="Arial"/>
                 <a:ea typeface="Arial"/>
@@ -4907,7 +4922,7 @@
           <p:cNvPr id="38" name="">
             <a:extLst xmlns:a="http://schemas.openxmlformats.org/drawingml/2006/main">
               <a:ext uri="{FF2B5EF4-FFF2-40B4-BE49-F238E27FC236}">
-                <a16:creationId xmlns:a16="http://schemas.microsoft.com/office/drawing/2014/main" id="{5DEB630F-61E2-4B5A-9CF8-0FC6331A1877}"/>
+                <a16:creationId xmlns:a16="http://schemas.microsoft.com/office/drawing/2014/main" id="{6EC92B69-3E99-4F95-AE18-F4DE6440DF55}"/>
               </a:ext>
             </a:extLst>
           </p:cNvPr>
@@ -4917,10 +4932,10 @@
           <p:nvPr/>
         </p:nvPicPr>
         <p:blipFill>
-          <a:blip xmlns:r="http://schemas.openxmlformats.org/officeDocument/2006/relationships" xmlns:a="http://schemas.openxmlformats.org/drawingml/2006/main" r:embed="Rba4a1ca1c18047f6">
+          <a:blip xmlns:r="http://schemas.openxmlformats.org/officeDocument/2006/relationships" xmlns:a="http://schemas.openxmlformats.org/drawingml/2006/main" r:embed="Rcbbbb35895d54531">
             <a:extLst>
               <a:ext uri="{96DAC541-7B7A-43D3-8B79-37D633B846F1}">
-                <asvg:svgBlip xmlns:asvg="http://schemas.microsoft.com/office/drawing/2016/SVG/main" r:embed="R1483162e304c44dc"/>
+                <asvg:svgBlip xmlns:asvg="http://schemas.microsoft.com/office/drawing/2016/SVG/main" r:embed="R1f28cb3e737e43c0"/>
               </a:ext>
             </a:extLst>
           </a:blip>
@@ -4941,7 +4956,7 @@
           <p:cNvPr id="39" name="Curate experimental data">
             <a:extLst xmlns:a="http://schemas.openxmlformats.org/drawingml/2006/main">
               <a:ext uri="{FF2B5EF4-FFF2-40B4-BE49-F238E27FC236}">
-                <a16:creationId xmlns:a16="http://schemas.microsoft.com/office/drawing/2014/main" id="{C1BDD7EA-6177-4ABE-954A-D24E3518BAE2}"/>
+                <a16:creationId xmlns:a16="http://schemas.microsoft.com/office/drawing/2014/main" id="{BB07630A-6E15-4EF7-8DCE-5175525B01A7}"/>
               </a:ext>
             </a:extLst>
           </p:cNvPr>
@@ -4969,7 +4984,7 @@
             <a:defPPr algn="l">
               <a:defRPr sz="2325" b="1">
                 <a:solidFill>
-                  <a:srgbClr val="152C3A"/>
+                  <a:srgbClr val="00355F"/>
                 </a:solidFill>
                 <a:latin typeface="Arial"/>
                 <a:ea typeface="Arial"/>
@@ -4985,7 +5000,7 @@
               <a:buNone/>
               <a:defRPr sz="2325" b="1">
                 <a:solidFill>
-                  <a:srgbClr val="152C3A"/>
+                  <a:srgbClr val="00355F"/>
                 </a:solidFill>
                 <a:latin typeface="Arial"/>
                 <a:ea typeface="Arial"/>
@@ -4995,7 +5010,7 @@
             <a:r>
               <a:rPr sz="2325" b="1">
                 <a:solidFill>
-                  <a:srgbClr val="152C3A"/>
+                  <a:srgbClr val="00355F"/>
                 </a:solidFill>
                 <a:latin typeface="Arial"/>
                 <a:ea typeface="Arial"/>
@@ -5011,7 +5026,7 @@
           <p:cNvPr id="40" name="Link sequence, target and assay context">
             <a:extLst xmlns:a="http://schemas.openxmlformats.org/drawingml/2006/main">
               <a:ext uri="{FF2B5EF4-FFF2-40B4-BE49-F238E27FC236}">
-                <a16:creationId xmlns:a16="http://schemas.microsoft.com/office/drawing/2014/main" id="{B842E8B3-2817-4124-83B2-EE309274D12D}"/>
+                <a16:creationId xmlns:a16="http://schemas.microsoft.com/office/drawing/2014/main" id="{36D57A17-EDC7-4065-ADFF-FEFB21F0E44D}"/>
               </a:ext>
             </a:extLst>
           </p:cNvPr>
@@ -5039,7 +5054,7 @@
             <a:defPPr algn="l">
               <a:defRPr sz="1688" b="0">
                 <a:solidFill>
-                  <a:srgbClr val="647887"/>
+                  <a:srgbClr val="00355F"/>
                 </a:solidFill>
                 <a:latin typeface="Arial"/>
                 <a:ea typeface="Arial"/>
@@ -5055,7 +5070,7 @@
               <a:buNone/>
               <a:defRPr sz="1688" b="0">
                 <a:solidFill>
-                  <a:srgbClr val="647887"/>
+                  <a:srgbClr val="00355F"/>
                 </a:solidFill>
                 <a:latin typeface="Arial"/>
                 <a:ea typeface="Arial"/>
@@ -5065,7 +5080,7 @@
             <a:r>
               <a:rPr sz="1688" b="0">
                 <a:solidFill>
-                  <a:srgbClr val="647887"/>
+                  <a:srgbClr val="00355F"/>
                 </a:solidFill>
                 <a:latin typeface="Arial"/>
                 <a:ea typeface="Arial"/>
@@ -5082,7 +5097,7 @@
               <a:buNone/>
               <a:defRPr sz="1688" b="0">
                 <a:solidFill>
-                  <a:srgbClr val="647887"/>
+                  <a:srgbClr val="00355F"/>
                 </a:solidFill>
                 <a:latin typeface="Arial"/>
                 <a:ea typeface="Arial"/>
@@ -5092,7 +5107,7 @@
             <a:r>
               <a:rPr sz="1688" b="0">
                 <a:solidFill>
-                  <a:srgbClr val="647887"/>
+                  <a:srgbClr val="00355F"/>
                 </a:solidFill>
                 <a:latin typeface="Arial"/>
                 <a:ea typeface="Arial"/>
@@ -5108,7 +5123,7 @@
           <p:cNvPr id="41" name="">
             <a:extLst xmlns:a="http://schemas.openxmlformats.org/drawingml/2006/main">
               <a:ext uri="{FF2B5EF4-FFF2-40B4-BE49-F238E27FC236}">
-                <a16:creationId xmlns:a16="http://schemas.microsoft.com/office/drawing/2014/main" id="{76E0607A-9851-4782-867D-0B131093566E}"/>
+                <a16:creationId xmlns:a16="http://schemas.microsoft.com/office/drawing/2014/main" id="{2CA81B9D-677A-49C6-8723-76B977C328E4}"/>
               </a:ext>
             </a:extLst>
           </p:cNvPr>
@@ -5128,7 +5143,7 @@
             </a:avLst>
           </a:prstGeom>
           <a:solidFill xmlns:a="http://schemas.openxmlformats.org/drawingml/2006/main">
-            <a:srgbClr val="E7EEF1"/>
+            <a:srgbClr val="EEF6FC"/>
           </a:solidFill>
           <a:ln xmlns:a="http://schemas.openxmlformats.org/drawingml/2006/main" w="9525">
             <a:noFill/>
@@ -5140,7 +5155,7 @@
           <p:cNvPr id="42" name="">
             <a:extLst xmlns:a="http://schemas.openxmlformats.org/drawingml/2006/main">
               <a:ext uri="{FF2B5EF4-FFF2-40B4-BE49-F238E27FC236}">
-                <a16:creationId xmlns:a16="http://schemas.microsoft.com/office/drawing/2014/main" id="{4E3D0666-8B4F-4CBF-A153-80D2D1503024}"/>
+                <a16:creationId xmlns:a16="http://schemas.microsoft.com/office/drawing/2014/main" id="{5CEEF46A-CCDC-4D62-B1E9-54849B0D5BAD}"/>
               </a:ext>
             </a:extLst>
           </p:cNvPr>
@@ -5164,7 +5179,7 @@
           </a:solidFill>
           <a:ln xmlns:a="http://schemas.openxmlformats.org/drawingml/2006/main" w="12383">
             <a:solidFill>
-              <a:srgbClr val="A7C2E2"/>
+              <a:srgbClr val="7399C6"/>
             </a:solidFill>
           </a:ln>
         </p:spPr>
@@ -5174,7 +5189,7 @@
           <p:cNvPr id="43" name="06  /  LEARN">
             <a:extLst xmlns:a="http://schemas.openxmlformats.org/drawingml/2006/main">
               <a:ext uri="{FF2B5EF4-FFF2-40B4-BE49-F238E27FC236}">
-                <a16:creationId xmlns:a16="http://schemas.microsoft.com/office/drawing/2014/main" id="{3D59CB0B-FC2A-40AB-8DFE-2827A04BC00F}"/>
+                <a16:creationId xmlns:a16="http://schemas.microsoft.com/office/drawing/2014/main" id="{EA55C5BD-A06D-431B-9445-31A0D59010B0}"/>
               </a:ext>
             </a:extLst>
           </p:cNvPr>
@@ -5202,7 +5217,7 @@
             <a:defPPr algn="l">
               <a:defRPr sz="1388" b="1">
                 <a:solidFill>
-                  <a:srgbClr val="647887"/>
+                  <a:srgbClr val="00355F"/>
                 </a:solidFill>
                 <a:latin typeface="Arial"/>
                 <a:ea typeface="Arial"/>
@@ -5218,7 +5233,7 @@
               <a:buNone/>
               <a:defRPr sz="1388" b="1">
                 <a:solidFill>
-                  <a:srgbClr val="647887"/>
+                  <a:srgbClr val="00355F"/>
                 </a:solidFill>
                 <a:latin typeface="Arial"/>
                 <a:ea typeface="Arial"/>
@@ -5228,7 +5243,7 @@
             <a:r>
               <a:rPr sz="1388" b="1">
                 <a:solidFill>
-                  <a:srgbClr val="647887"/>
+                  <a:srgbClr val="00355F"/>
                 </a:solidFill>
                 <a:latin typeface="Arial"/>
                 <a:ea typeface="Arial"/>
@@ -5244,7 +5259,7 @@
           <p:cNvPr id="44" name="">
             <a:extLst xmlns:a="http://schemas.openxmlformats.org/drawingml/2006/main">
               <a:ext uri="{FF2B5EF4-FFF2-40B4-BE49-F238E27FC236}">
-                <a16:creationId xmlns:a16="http://schemas.microsoft.com/office/drawing/2014/main" id="{40792CAF-DFE9-4262-84C7-B84086677E07}"/>
+                <a16:creationId xmlns:a16="http://schemas.microsoft.com/office/drawing/2014/main" id="{8E203DC4-2DAE-461E-A649-34FC80CBC731}"/>
               </a:ext>
             </a:extLst>
           </p:cNvPr>
@@ -5254,10 +5269,10 @@
           <p:nvPr/>
         </p:nvPicPr>
         <p:blipFill>
-          <a:blip xmlns:r="http://schemas.openxmlformats.org/officeDocument/2006/relationships" xmlns:a="http://schemas.openxmlformats.org/drawingml/2006/main" r:embed="Rd0b6a6de732f4cd4">
+          <a:blip xmlns:r="http://schemas.openxmlformats.org/officeDocument/2006/relationships" xmlns:a="http://schemas.openxmlformats.org/drawingml/2006/main" r:embed="R569824f438d54ec4">
             <a:extLst>
               <a:ext uri="{96DAC541-7B7A-43D3-8B79-37D633B846F1}">
-                <asvg:svgBlip xmlns:asvg="http://schemas.microsoft.com/office/drawing/2016/SVG/main" r:embed="R88628959f67049df"/>
+                <asvg:svgBlip xmlns:asvg="http://schemas.microsoft.com/office/drawing/2016/SVG/main" r:embed="Rb7043513653848fd"/>
               </a:ext>
             </a:extLst>
           </a:blip>
@@ -5278,7 +5293,7 @@
           <p:cNvPr id="45" name="Improve model + policy">
             <a:extLst xmlns:a="http://schemas.openxmlformats.org/drawingml/2006/main">
               <a:ext uri="{FF2B5EF4-FFF2-40B4-BE49-F238E27FC236}">
-                <a16:creationId xmlns:a16="http://schemas.microsoft.com/office/drawing/2014/main" id="{6A21D547-252D-49EE-B7D8-CCE639A8C9F0}"/>
+                <a16:creationId xmlns:a16="http://schemas.microsoft.com/office/drawing/2014/main" id="{EBE18ABB-F3AD-425E-80A8-5E75188F73EE}"/>
               </a:ext>
             </a:extLst>
           </p:cNvPr>
@@ -5306,7 +5321,7 @@
             <a:defPPr algn="l">
               <a:defRPr sz="2325" b="1">
                 <a:solidFill>
-                  <a:srgbClr val="152C3A"/>
+                  <a:srgbClr val="00355F"/>
                 </a:solidFill>
                 <a:latin typeface="Arial"/>
                 <a:ea typeface="Arial"/>
@@ -5322,7 +5337,7 @@
               <a:buNone/>
               <a:defRPr sz="2325" b="1">
                 <a:solidFill>
-                  <a:srgbClr val="152C3A"/>
+                  <a:srgbClr val="00355F"/>
                 </a:solidFill>
                 <a:latin typeface="Arial"/>
                 <a:ea typeface="Arial"/>
@@ -5332,7 +5347,7 @@
             <a:r>
               <a:rPr sz="2325" b="1">
                 <a:solidFill>
-                  <a:srgbClr val="152C3A"/>
+                  <a:srgbClr val="00355F"/>
                 </a:solidFill>
                 <a:latin typeface="Arial"/>
                 <a:ea typeface="Arial"/>
@@ -5348,7 +5363,7 @@
           <p:cNvPr id="46" name="Retrain / adapt models and selection">
             <a:extLst xmlns:a="http://schemas.openxmlformats.org/drawingml/2006/main">
               <a:ext uri="{FF2B5EF4-FFF2-40B4-BE49-F238E27FC236}">
-                <a16:creationId xmlns:a16="http://schemas.microsoft.com/office/drawing/2014/main" id="{200FEE92-BCCD-4434-9F49-9510EC7A5835}"/>
+                <a16:creationId xmlns:a16="http://schemas.microsoft.com/office/drawing/2014/main" id="{58CE0FBA-272D-40EA-9902-C6FED10E79D7}"/>
               </a:ext>
             </a:extLst>
           </p:cNvPr>
@@ -5376,7 +5391,7 @@
             <a:defPPr algn="l">
               <a:defRPr sz="1688" b="0">
                 <a:solidFill>
-                  <a:srgbClr val="647887"/>
+                  <a:srgbClr val="00355F"/>
                 </a:solidFill>
                 <a:latin typeface="Arial"/>
                 <a:ea typeface="Arial"/>
@@ -5392,7 +5407,7 @@
               <a:buNone/>
               <a:defRPr sz="1688" b="0">
                 <a:solidFill>
-                  <a:srgbClr val="647887"/>
+                  <a:srgbClr val="00355F"/>
                 </a:solidFill>
                 <a:latin typeface="Arial"/>
                 <a:ea typeface="Arial"/>
@@ -5402,7 +5417,7 @@
             <a:r>
               <a:rPr sz="1688" b="0">
                 <a:solidFill>
-                  <a:srgbClr val="647887"/>
+                  <a:srgbClr val="00355F"/>
                 </a:solidFill>
                 <a:latin typeface="Arial"/>
                 <a:ea typeface="Arial"/>
@@ -5419,7 +5434,7 @@
               <a:buNone/>
               <a:defRPr sz="1688" b="0">
                 <a:solidFill>
-                  <a:srgbClr val="647887"/>
+                  <a:srgbClr val="00355F"/>
                 </a:solidFill>
                 <a:latin typeface="Arial"/>
                 <a:ea typeface="Arial"/>
@@ -5429,7 +5444,7 @@
             <a:r>
               <a:rPr sz="1688" b="0">
                 <a:solidFill>
-                  <a:srgbClr val="647887"/>
+                  <a:srgbClr val="00355F"/>
                 </a:solidFill>
                 <a:latin typeface="Arial"/>
                 <a:ea typeface="Arial"/>
@@ -5445,7 +5460,7 @@
           <p:cNvPr id="47" name="">
             <a:extLst xmlns:a="http://schemas.openxmlformats.org/drawingml/2006/main">
               <a:ext uri="{FF2B5EF4-FFF2-40B4-BE49-F238E27FC236}">
-                <a16:creationId xmlns:a16="http://schemas.microsoft.com/office/drawing/2014/main" id="{30F21537-AEBC-4AA2-BBAD-BF86B72870BD}"/>
+                <a16:creationId xmlns:a16="http://schemas.microsoft.com/office/drawing/2014/main" id="{42F3658A-830F-4C44-9011-D43585AAE2F2}"/>
               </a:ext>
             </a:extLst>
           </p:cNvPr>
@@ -5474,7 +5489,7 @@
           <a:noFill xmlns:a="http://schemas.openxmlformats.org/drawingml/2006/main"/>
           <a:ln xmlns:a="http://schemas.openxmlformats.org/drawingml/2006/main" w="28575">
             <a:solidFill>
-              <a:srgbClr val="007D80"/>
+              <a:srgbClr val="00355F"/>
             </a:solidFill>
           </a:ln>
         </p:spPr>
@@ -5484,7 +5499,7 @@
           <p:cNvPr id="48" name="">
             <a:extLst xmlns:a="http://schemas.openxmlformats.org/drawingml/2006/main">
               <a:ext uri="{FF2B5EF4-FFF2-40B4-BE49-F238E27FC236}">
-                <a16:creationId xmlns:a16="http://schemas.microsoft.com/office/drawing/2014/main" id="{2827FC20-D8AB-4D63-B55A-E7A6F55EEC6B}"/>
+                <a16:creationId xmlns:a16="http://schemas.microsoft.com/office/drawing/2014/main" id="{030F6A45-26D0-4AE7-AEFE-6AC0E6D6A8B5}"/>
               </a:ext>
             </a:extLst>
           </p:cNvPr>
@@ -5515,7 +5530,7 @@
             </a:pathLst>
           </a:custGeom>
           <a:solidFill xmlns:a="http://schemas.openxmlformats.org/drawingml/2006/main">
-            <a:srgbClr val="007D80"/>
+            <a:srgbClr val="00355F"/>
           </a:solidFill>
           <a:ln xmlns:a="http://schemas.openxmlformats.org/drawingml/2006/main" w="0">
             <a:noFill/>
@@ -5527,7 +5542,7 @@
           <p:cNvPr id="49" name="">
             <a:extLst xmlns:a="http://schemas.openxmlformats.org/drawingml/2006/main">
               <a:ext uri="{FF2B5EF4-FFF2-40B4-BE49-F238E27FC236}">
-                <a16:creationId xmlns:a16="http://schemas.microsoft.com/office/drawing/2014/main" id="{812B4D0F-3D69-4799-BBF0-4D991E101AD8}"/>
+                <a16:creationId xmlns:a16="http://schemas.microsoft.com/office/drawing/2014/main" id="{D9D31ED1-0DDE-4A20-82F7-483B49540570}"/>
               </a:ext>
             </a:extLst>
           </p:cNvPr>
@@ -5556,7 +5571,7 @@
           <a:noFill xmlns:a="http://schemas.openxmlformats.org/drawingml/2006/main"/>
           <a:ln xmlns:a="http://schemas.openxmlformats.org/drawingml/2006/main" w="28575">
             <a:solidFill>
-              <a:srgbClr val="007D80"/>
+              <a:srgbClr val="00355F"/>
             </a:solidFill>
           </a:ln>
         </p:spPr>
@@ -5566,7 +5581,7 @@
           <p:cNvPr id="50" name="">
             <a:extLst xmlns:a="http://schemas.openxmlformats.org/drawingml/2006/main">
               <a:ext uri="{FF2B5EF4-FFF2-40B4-BE49-F238E27FC236}">
-                <a16:creationId xmlns:a16="http://schemas.microsoft.com/office/drawing/2014/main" id="{A984A3AB-F012-4C82-B526-430EE16E7E7B}"/>
+                <a16:creationId xmlns:a16="http://schemas.microsoft.com/office/drawing/2014/main" id="{373C0D5B-619B-40F0-BCE5-541DDC3D727F}"/>
               </a:ext>
             </a:extLst>
           </p:cNvPr>
@@ -5597,7 +5612,7 @@
             </a:pathLst>
           </a:custGeom>
           <a:solidFill xmlns:a="http://schemas.openxmlformats.org/drawingml/2006/main">
-            <a:srgbClr val="007D80"/>
+            <a:srgbClr val="00355F"/>
           </a:solidFill>
           <a:ln xmlns:a="http://schemas.openxmlformats.org/drawingml/2006/main" w="0">
             <a:noFill/>
@@ -5609,7 +5624,7 @@
           <p:cNvPr id="51" name="Proposals">
             <a:extLst xmlns:a="http://schemas.openxmlformats.org/drawingml/2006/main">
               <a:ext uri="{FF2B5EF4-FFF2-40B4-BE49-F238E27FC236}">
-                <a16:creationId xmlns:a16="http://schemas.microsoft.com/office/drawing/2014/main" id="{B790C13C-A970-40CD-A56E-628528F4C335}"/>
+                <a16:creationId xmlns:a16="http://schemas.microsoft.com/office/drawing/2014/main" id="{62E5F100-DBE5-430A-AF36-1049DDAC218D}"/>
               </a:ext>
             </a:extLst>
           </p:cNvPr>
@@ -5637,7 +5652,7 @@
             <a:defPPr algn="ctr">
               <a:defRPr sz="1500" b="0">
                 <a:solidFill>
-                  <a:srgbClr val="647887"/>
+                  <a:srgbClr val="00355F"/>
                 </a:solidFill>
                 <a:latin typeface="Arial"/>
                 <a:ea typeface="Arial"/>
@@ -5653,7 +5668,7 @@
               <a:buNone/>
               <a:defRPr sz="1500" b="0">
                 <a:solidFill>
-                  <a:srgbClr val="647887"/>
+                  <a:srgbClr val="00355F"/>
                 </a:solidFill>
                 <a:latin typeface="Arial"/>
                 <a:ea typeface="Arial"/>
@@ -5663,7 +5678,7 @@
             <a:r>
               <a:rPr sz="1500" b="0">
                 <a:solidFill>
-                  <a:srgbClr val="647887"/>
+                  <a:srgbClr val="00355F"/>
                 </a:solidFill>
                 <a:latin typeface="Arial"/>
                 <a:ea typeface="Arial"/>
@@ -5679,7 +5694,7 @@
           <p:cNvPr id="52" name="Protocols">
             <a:extLst xmlns:a="http://schemas.openxmlformats.org/drawingml/2006/main">
               <a:ext uri="{FF2B5EF4-FFF2-40B4-BE49-F238E27FC236}">
-                <a16:creationId xmlns:a16="http://schemas.microsoft.com/office/drawing/2014/main" id="{99D64F9B-238B-4C3A-A4F5-8A9F8270B816}"/>
+                <a16:creationId xmlns:a16="http://schemas.microsoft.com/office/drawing/2014/main" id="{AC29A75B-9AA3-4B48-B853-B8F0FBAE552D}"/>
               </a:ext>
             </a:extLst>
           </p:cNvPr>
@@ -5707,7 +5722,7 @@
             <a:defPPr algn="ctr">
               <a:defRPr sz="1500" b="0">
                 <a:solidFill>
-                  <a:srgbClr val="647887"/>
+                  <a:srgbClr val="00355F"/>
                 </a:solidFill>
                 <a:latin typeface="Arial"/>
                 <a:ea typeface="Arial"/>
@@ -5723,7 +5738,7 @@
               <a:buNone/>
               <a:defRPr sz="1500" b="0">
                 <a:solidFill>
-                  <a:srgbClr val="647887"/>
+                  <a:srgbClr val="00355F"/>
                 </a:solidFill>
                 <a:latin typeface="Arial"/>
                 <a:ea typeface="Arial"/>
@@ -5733,7 +5748,7 @@
             <a:r>
               <a:rPr sz="1500" b="0">
                 <a:solidFill>
-                  <a:srgbClr val="647887"/>
+                  <a:srgbClr val="00355F"/>
                 </a:solidFill>
                 <a:latin typeface="Arial"/>
                 <a:ea typeface="Arial"/>
@@ -5749,7 +5764,7 @@
           <p:cNvPr id="53" name="">
             <a:extLst xmlns:a="http://schemas.openxmlformats.org/drawingml/2006/main">
               <a:ext uri="{FF2B5EF4-FFF2-40B4-BE49-F238E27FC236}">
-                <a16:creationId xmlns:a16="http://schemas.microsoft.com/office/drawing/2014/main" id="{46BAA53A-490D-47FF-B730-539EF9087071}"/>
+                <a16:creationId xmlns:a16="http://schemas.microsoft.com/office/drawing/2014/main" id="{DA34D1E5-B6C1-4844-9F05-3C6065878680}"/>
               </a:ext>
             </a:extLst>
           </p:cNvPr>
@@ -5778,7 +5793,7 @@
           <a:noFill xmlns:a="http://schemas.openxmlformats.org/drawingml/2006/main"/>
           <a:ln xmlns:a="http://schemas.openxmlformats.org/drawingml/2006/main" w="28575">
             <a:solidFill>
-              <a:srgbClr val="007D80"/>
+              <a:srgbClr val="00355F"/>
             </a:solidFill>
           </a:ln>
         </p:spPr>
@@ -5788,7 +5803,7 @@
           <p:cNvPr id="54" name="">
             <a:extLst xmlns:a="http://schemas.openxmlformats.org/drawingml/2006/main">
               <a:ext uri="{FF2B5EF4-FFF2-40B4-BE49-F238E27FC236}">
-                <a16:creationId xmlns:a16="http://schemas.microsoft.com/office/drawing/2014/main" id="{75DC918F-D6F2-4CB7-A13F-63FA87808F81}"/>
+                <a16:creationId xmlns:a16="http://schemas.microsoft.com/office/drawing/2014/main" id="{C46F62C2-F4E9-47BB-93EE-1BB41416B0C0}"/>
               </a:ext>
             </a:extLst>
           </p:cNvPr>
@@ -5819,7 +5834,7 @@
             </a:pathLst>
           </a:custGeom>
           <a:solidFill xmlns:a="http://schemas.openxmlformats.org/drawingml/2006/main">
-            <a:srgbClr val="007D80"/>
+            <a:srgbClr val="00355F"/>
           </a:solidFill>
           <a:ln xmlns:a="http://schemas.openxmlformats.org/drawingml/2006/main" w="0">
             <a:noFill/>
@@ -5831,7 +5846,7 @@
           <p:cNvPr id="55" name="">
             <a:extLst xmlns:a="http://schemas.openxmlformats.org/drawingml/2006/main">
               <a:ext uri="{FF2B5EF4-FFF2-40B4-BE49-F238E27FC236}">
-                <a16:creationId xmlns:a16="http://schemas.microsoft.com/office/drawing/2014/main" id="{E60A3050-2589-40CF-A42C-6EEBD4CA0B04}"/>
+                <a16:creationId xmlns:a16="http://schemas.microsoft.com/office/drawing/2014/main" id="{03C8E8A3-8ED5-47B1-A0A9-F9D89D97981C}"/>
               </a:ext>
             </a:extLst>
           </p:cNvPr>
@@ -5860,7 +5875,7 @@
           <a:noFill xmlns:a="http://schemas.openxmlformats.org/drawingml/2006/main"/>
           <a:ln xmlns:a="http://schemas.openxmlformats.org/drawingml/2006/main" w="28575">
             <a:solidFill>
-              <a:srgbClr val="007D80"/>
+              <a:srgbClr val="00355F"/>
             </a:solidFill>
           </a:ln>
         </p:spPr>
@@ -5870,7 +5885,7 @@
           <p:cNvPr id="56" name="">
             <a:extLst xmlns:a="http://schemas.openxmlformats.org/drawingml/2006/main">
               <a:ext uri="{FF2B5EF4-FFF2-40B4-BE49-F238E27FC236}">
-                <a16:creationId xmlns:a16="http://schemas.microsoft.com/office/drawing/2014/main" id="{CD2FDFF1-71C0-4BA1-A751-924659EACF43}"/>
+                <a16:creationId xmlns:a16="http://schemas.microsoft.com/office/drawing/2014/main" id="{707E2299-1182-4951-ACFA-F93D8EB17FB5}"/>
               </a:ext>
             </a:extLst>
           </p:cNvPr>
@@ -5901,7 +5916,7 @@
             </a:pathLst>
           </a:custGeom>
           <a:solidFill xmlns:a="http://schemas.openxmlformats.org/drawingml/2006/main">
-            <a:srgbClr val="007D80"/>
+            <a:srgbClr val="00355F"/>
           </a:solidFill>
           <a:ln xmlns:a="http://schemas.openxmlformats.org/drawingml/2006/main" w="0">
             <a:noFill/>
@@ -5913,7 +5928,7 @@
           <p:cNvPr id="57" name="Measurements">
             <a:extLst xmlns:a="http://schemas.openxmlformats.org/drawingml/2006/main">
               <a:ext uri="{FF2B5EF4-FFF2-40B4-BE49-F238E27FC236}">
-                <a16:creationId xmlns:a16="http://schemas.microsoft.com/office/drawing/2014/main" id="{97162B98-2DE1-4697-9F78-D0B768FE29BA}"/>
+                <a16:creationId xmlns:a16="http://schemas.microsoft.com/office/drawing/2014/main" id="{5F78FB00-4DF4-4351-989D-E5A580AF7A08}"/>
               </a:ext>
             </a:extLst>
           </p:cNvPr>
@@ -5941,7 +5956,7 @@
             <a:defPPr algn="ctr">
               <a:defRPr sz="1500" b="0">
                 <a:solidFill>
-                  <a:srgbClr val="647887"/>
+                  <a:srgbClr val="00355F"/>
                 </a:solidFill>
                 <a:latin typeface="Arial"/>
                 <a:ea typeface="Arial"/>
@@ -5957,7 +5972,7 @@
               <a:buNone/>
               <a:defRPr sz="1500" b="0">
                 <a:solidFill>
-                  <a:srgbClr val="647887"/>
+                  <a:srgbClr val="00355F"/>
                 </a:solidFill>
                 <a:latin typeface="Arial"/>
                 <a:ea typeface="Arial"/>
@@ -5967,7 +5982,7 @@
             <a:r>
               <a:rPr sz="1500" b="0">
                 <a:solidFill>
-                  <a:srgbClr val="647887"/>
+                  <a:srgbClr val="00355F"/>
                 </a:solidFill>
                 <a:latin typeface="Arial"/>
                 <a:ea typeface="Arial"/>
@@ -5983,7 +5998,7 @@
           <p:cNvPr id="58" name="Training evidence">
             <a:extLst xmlns:a="http://schemas.openxmlformats.org/drawingml/2006/main">
               <a:ext uri="{FF2B5EF4-FFF2-40B4-BE49-F238E27FC236}">
-                <a16:creationId xmlns:a16="http://schemas.microsoft.com/office/drawing/2014/main" id="{005DA57B-9E9A-417C-92DA-29D32F98A8CE}"/>
+                <a16:creationId xmlns:a16="http://schemas.microsoft.com/office/drawing/2014/main" id="{F30F656D-243C-45FA-87E7-685088487C3F}"/>
               </a:ext>
             </a:extLst>
           </p:cNvPr>
@@ -6011,7 +6026,7 @@
             <a:defPPr algn="ctr">
               <a:defRPr sz="1500" b="0">
                 <a:solidFill>
-                  <a:srgbClr val="647887"/>
+                  <a:srgbClr val="00355F"/>
                 </a:solidFill>
                 <a:latin typeface="Arial"/>
                 <a:ea typeface="Arial"/>
@@ -6027,7 +6042,7 @@
               <a:buNone/>
               <a:defRPr sz="1500" b="0">
                 <a:solidFill>
-                  <a:srgbClr val="647887"/>
+                  <a:srgbClr val="00355F"/>
                 </a:solidFill>
                 <a:latin typeface="Arial"/>
                 <a:ea typeface="Arial"/>
@@ -6037,7 +6052,7 @@
             <a:r>
               <a:rPr sz="1500" b="0">
                 <a:solidFill>
-                  <a:srgbClr val="647887"/>
+                  <a:srgbClr val="00355F"/>
                 </a:solidFill>
                 <a:latin typeface="Arial"/>
                 <a:ea typeface="Arial"/>
@@ -6053,7 +6068,7 @@
           <p:cNvPr id="59" name="">
             <a:extLst xmlns:a="http://schemas.openxmlformats.org/drawingml/2006/main">
               <a:ext uri="{FF2B5EF4-FFF2-40B4-BE49-F238E27FC236}">
-                <a16:creationId xmlns:a16="http://schemas.microsoft.com/office/drawing/2014/main" id="{B5BDFA8F-10D9-450E-AC59-BDB3EA8F75EB}"/>
+                <a16:creationId xmlns:a16="http://schemas.microsoft.com/office/drawing/2014/main" id="{0562B4A4-5A32-40F2-87C6-32263E18B014}"/>
               </a:ext>
             </a:extLst>
           </p:cNvPr>
@@ -6082,7 +6097,7 @@
           <a:noFill xmlns:a="http://schemas.openxmlformats.org/drawingml/2006/main"/>
           <a:ln xmlns:a="http://schemas.openxmlformats.org/drawingml/2006/main" w="28575">
             <a:solidFill>
-              <a:srgbClr val="007D80"/>
+              <a:srgbClr val="00355F"/>
             </a:solidFill>
           </a:ln>
         </p:spPr>
@@ -6092,7 +6107,7 @@
           <p:cNvPr id="60" name="">
             <a:extLst xmlns:a="http://schemas.openxmlformats.org/drawingml/2006/main">
               <a:ext uri="{FF2B5EF4-FFF2-40B4-BE49-F238E27FC236}">
-                <a16:creationId xmlns:a16="http://schemas.microsoft.com/office/drawing/2014/main" id="{014BF2DD-569C-45A8-8B60-B57812A2BD63}"/>
+                <a16:creationId xmlns:a16="http://schemas.microsoft.com/office/drawing/2014/main" id="{76B214D8-7639-4567-8BD9-460EB29948B9}"/>
               </a:ext>
             </a:extLst>
           </p:cNvPr>
@@ -6123,7 +6138,7 @@
             </a:pathLst>
           </a:custGeom>
           <a:solidFill xmlns:a="http://schemas.openxmlformats.org/drawingml/2006/main">
-            <a:srgbClr val="007D80"/>
+            <a:srgbClr val="00355F"/>
           </a:solidFill>
           <a:ln xmlns:a="http://schemas.openxmlformats.org/drawingml/2006/main" w="0">
             <a:noFill/>
@@ -6135,7 +6150,7 @@
           <p:cNvPr id="61" name="">
             <a:extLst xmlns:a="http://schemas.openxmlformats.org/drawingml/2006/main">
               <a:ext uri="{FF2B5EF4-FFF2-40B4-BE49-F238E27FC236}">
-                <a16:creationId xmlns:a16="http://schemas.microsoft.com/office/drawing/2014/main" id="{963A3762-A8D6-47A5-9D83-50631497ACB5}"/>
+                <a16:creationId xmlns:a16="http://schemas.microsoft.com/office/drawing/2014/main" id="{63A46D2E-EC3B-4D94-93F0-A3F67A7BF5D8}"/>
               </a:ext>
             </a:extLst>
           </p:cNvPr>
@@ -6164,7 +6179,7 @@
           <a:noFill xmlns:a="http://schemas.openxmlformats.org/drawingml/2006/main"/>
           <a:ln xmlns:a="http://schemas.openxmlformats.org/drawingml/2006/main" w="28575">
             <a:solidFill>
-              <a:srgbClr val="2B62B1"/>
+              <a:srgbClr val="00355F"/>
             </a:solidFill>
           </a:ln>
         </p:spPr>
@@ -6174,7 +6189,7 @@
           <p:cNvPr id="62" name="">
             <a:extLst xmlns:a="http://schemas.openxmlformats.org/drawingml/2006/main">
               <a:ext uri="{FF2B5EF4-FFF2-40B4-BE49-F238E27FC236}">
-                <a16:creationId xmlns:a16="http://schemas.microsoft.com/office/drawing/2014/main" id="{BBCD4DF6-2EE9-41EE-A40C-FA757FAB7B33}"/>
+                <a16:creationId xmlns:a16="http://schemas.microsoft.com/office/drawing/2014/main" id="{8AC32DE0-EE52-4B89-AFEB-07F23287CA50}"/>
               </a:ext>
             </a:extLst>
           </p:cNvPr>
@@ -6205,7 +6220,7 @@
             </a:pathLst>
           </a:custGeom>
           <a:solidFill xmlns:a="http://schemas.openxmlformats.org/drawingml/2006/main">
-            <a:srgbClr val="2B62B1"/>
+            <a:srgbClr val="00355F"/>
           </a:solidFill>
           <a:ln xmlns:a="http://schemas.openxmlformats.org/drawingml/2006/main" w="0">
             <a:noFill/>
@@ -6217,7 +6232,7 @@
           <p:cNvPr id="63" name="Deploy only">
             <a:extLst xmlns:a="http://schemas.openxmlformats.org/drawingml/2006/main">
               <a:ext uri="{FF2B5EF4-FFF2-40B4-BE49-F238E27FC236}">
-                <a16:creationId xmlns:a16="http://schemas.microsoft.com/office/drawing/2014/main" id="{EA99020A-F4B9-4BAB-90B5-CA3C0A957814}"/>
+                <a16:creationId xmlns:a16="http://schemas.microsoft.com/office/drawing/2014/main" id="{EB1CBE72-62E6-4D2D-93CD-6CF603F37FCB}"/>
               </a:ext>
             </a:extLst>
           </p:cNvPr>
@@ -6245,7 +6260,7 @@
             <a:defPPr algn="l">
               <a:defRPr sz="1725" b="1">
                 <a:solidFill>
-                  <a:srgbClr val="2B62B1"/>
+                  <a:srgbClr val="00355F"/>
                 </a:solidFill>
                 <a:latin typeface="Arial"/>
                 <a:ea typeface="Arial"/>
@@ -6261,7 +6276,7 @@
               <a:buNone/>
               <a:defRPr sz="1725" b="1">
                 <a:solidFill>
-                  <a:srgbClr val="2B62B1"/>
+                  <a:srgbClr val="00355F"/>
                 </a:solidFill>
                 <a:latin typeface="Arial"/>
                 <a:ea typeface="Arial"/>
@@ -6271,7 +6286,7 @@
             <a:r>
               <a:rPr sz="1725" b="1">
                 <a:solidFill>
-                  <a:srgbClr val="2B62B1"/>
+                  <a:srgbClr val="00355F"/>
                 </a:solidFill>
                 <a:latin typeface="Arial"/>
                 <a:ea typeface="Arial"/>
@@ -6288,7 +6303,7 @@
               <a:buNone/>
               <a:defRPr sz="1725" b="1">
                 <a:solidFill>
-                  <a:srgbClr val="2B62B1"/>
+                  <a:srgbClr val="00355F"/>
                 </a:solidFill>
                 <a:latin typeface="Arial"/>
                 <a:ea typeface="Arial"/>
@@ -6298,7 +6313,7 @@
             <a:r>
               <a:rPr sz="1725" b="1">
                 <a:solidFill>
-                  <a:srgbClr val="2B62B1"/>
+                  <a:srgbClr val="00355F"/>
                 </a:solidFill>
                 <a:latin typeface="Arial"/>
                 <a:ea typeface="Arial"/>
@@ -6315,7 +6330,7 @@
               <a:buNone/>
               <a:defRPr sz="1725" b="1">
                 <a:solidFill>
-                  <a:srgbClr val="2B62B1"/>
+                  <a:srgbClr val="00355F"/>
                 </a:solidFill>
                 <a:latin typeface="Arial"/>
                 <a:ea typeface="Arial"/>
@@ -6325,7 +6340,7 @@
             <a:r>
               <a:rPr sz="1725" b="1">
                 <a:solidFill>
-                  <a:srgbClr val="2B62B1"/>
+                  <a:srgbClr val="00355F"/>
                 </a:solidFill>
                 <a:latin typeface="Arial"/>
                 <a:ea typeface="Arial"/>
@@ -6341,7 +6356,7 @@
           <p:cNvPr id="64" name="Throughput">
             <a:extLst xmlns:a="http://schemas.openxmlformats.org/drawingml/2006/main">
               <a:ext uri="{FF2B5EF4-FFF2-40B4-BE49-F238E27FC236}">
-                <a16:creationId xmlns:a16="http://schemas.microsoft.com/office/drawing/2014/main" id="{1E05B7D8-7028-4EBD-90F1-654394C8249F}"/>
+                <a16:creationId xmlns:a16="http://schemas.microsoft.com/office/drawing/2014/main" id="{1F4FA125-0248-4B85-9425-3775A80848FA}"/>
               </a:ext>
             </a:extLst>
           </p:cNvPr>
@@ -6369,7 +6384,7 @@
             <a:defPPr algn="l">
               <a:defRPr sz="1725" b="1">
                 <a:solidFill>
-                  <a:srgbClr val="007D80"/>
+                  <a:srgbClr val="00355F"/>
                 </a:solidFill>
                 <a:latin typeface="Arial"/>
                 <a:ea typeface="Arial"/>
@@ -6385,7 +6400,7 @@
               <a:buNone/>
               <a:defRPr sz="1725" b="1">
                 <a:solidFill>
-                  <a:srgbClr val="007D80"/>
+                  <a:srgbClr val="00355F"/>
                 </a:solidFill>
                 <a:latin typeface="Arial"/>
                 <a:ea typeface="Arial"/>
@@ -6395,7 +6410,7 @@
             <a:r>
               <a:rPr sz="1725" b="1">
                 <a:solidFill>
-                  <a:srgbClr val="007D80"/>
+                  <a:srgbClr val="00355F"/>
                 </a:solidFill>
                 <a:latin typeface="Arial"/>
                 <a:ea typeface="Arial"/>
@@ -6412,7 +6427,7 @@
               <a:buNone/>
               <a:defRPr sz="1725" b="1">
                 <a:solidFill>
-                  <a:srgbClr val="007D80"/>
+                  <a:srgbClr val="00355F"/>
                 </a:solidFill>
                 <a:latin typeface="Arial"/>
                 <a:ea typeface="Arial"/>
@@ -6422,7 +6437,7 @@
             <a:r>
               <a:rPr sz="1725" b="1">
                 <a:solidFill>
-                  <a:srgbClr val="007D80"/>
+                  <a:srgbClr val="00355F"/>
                 </a:solidFill>
                 <a:latin typeface="Arial"/>
                 <a:ea typeface="Arial"/>
@@ -6439,7 +6454,7 @@
               <a:buNone/>
               <a:defRPr sz="1725" b="1">
                 <a:solidFill>
-                  <a:srgbClr val="007D80"/>
+                  <a:srgbClr val="00355F"/>
                 </a:solidFill>
                 <a:latin typeface="Arial"/>
                 <a:ea typeface="Arial"/>
@@ -6449,7 +6464,7 @@
             <a:r>
               <a:rPr sz="1725" b="1">
                 <a:solidFill>
-                  <a:srgbClr val="007D80"/>
+                  <a:srgbClr val="00355F"/>
                 </a:solidFill>
                 <a:latin typeface="Arial"/>
                 <a:ea typeface="Arial"/>
@@ -6465,7 +6480,7 @@
           <p:cNvPr id="65" name="Better AI → better experiments">
             <a:extLst xmlns:a="http://schemas.openxmlformats.org/drawingml/2006/main">
               <a:ext uri="{FF2B5EF4-FFF2-40B4-BE49-F238E27FC236}">
-                <a16:creationId xmlns:a16="http://schemas.microsoft.com/office/drawing/2014/main" id="{EC46A08F-94FB-4670-B8DB-6A457B72B02A}"/>
+                <a16:creationId xmlns:a16="http://schemas.microsoft.com/office/drawing/2014/main" id="{CBD49D23-8D17-4A5A-B216-8CD52D045135}"/>
               </a:ext>
             </a:extLst>
           </p:cNvPr>
@@ -6493,7 +6508,7 @@
             <a:defPPr algn="ctr">
               <a:defRPr sz="2850" b="1">
                 <a:solidFill>
-                  <a:srgbClr val="152C3A"/>
+                  <a:srgbClr val="00355F"/>
                 </a:solidFill>
                 <a:latin typeface="Arial"/>
                 <a:ea typeface="Arial"/>
@@ -6509,7 +6524,7 @@
               <a:buNone/>
               <a:defRPr sz="2850" b="1">
                 <a:solidFill>
-                  <a:srgbClr val="152C3A"/>
+                  <a:srgbClr val="00355F"/>
                 </a:solidFill>
                 <a:latin typeface="Arial"/>
                 <a:ea typeface="Arial"/>
@@ -6519,7 +6534,7 @@
             <a:r>
               <a:rPr sz="2850" b="1">
                 <a:solidFill>
-                  <a:srgbClr val="152C3A"/>
+                  <a:srgbClr val="00355F"/>
                 </a:solidFill>
                 <a:latin typeface="Arial"/>
                 <a:ea typeface="Arial"/>
@@ -6536,7 +6551,7 @@
               <a:buNone/>
               <a:defRPr sz="2850" b="1">
                 <a:solidFill>
-                  <a:srgbClr val="152C3A"/>
+                  <a:srgbClr val="00355F"/>
                 </a:solidFill>
                 <a:latin typeface="Arial"/>
                 <a:ea typeface="Arial"/>
@@ -6546,7 +6561,7 @@
             <a:r>
               <a:rPr sz="2850" b="1">
                 <a:solidFill>
-                  <a:srgbClr val="152C3A"/>
+                  <a:srgbClr val="00355F"/>
                 </a:solidFill>
                 <a:latin typeface="Arial"/>
                 <a:ea typeface="Arial"/>
@@ -6562,7 +6577,7 @@
           <p:cNvPr id="66" name="Potential recursive gains need comparable,">
             <a:extLst xmlns:a="http://schemas.openxmlformats.org/drawingml/2006/main">
               <a:ext uri="{FF2B5EF4-FFF2-40B4-BE49-F238E27FC236}">
-                <a16:creationId xmlns:a16="http://schemas.microsoft.com/office/drawing/2014/main" id="{45D4E240-6003-47D7-8B4E-8B1CA7CC537B}"/>
+                <a16:creationId xmlns:a16="http://schemas.microsoft.com/office/drawing/2014/main" id="{F8A6239D-1B14-4613-9AC6-59F5FCC5D61C}"/>
               </a:ext>
             </a:extLst>
           </p:cNvPr>
@@ -6590,7 +6605,7 @@
             <a:defPPr algn="ctr">
               <a:defRPr sz="1650" b="0">
                 <a:solidFill>
-                  <a:srgbClr val="647887"/>
+                  <a:srgbClr val="00355F"/>
                 </a:solidFill>
                 <a:latin typeface="Arial"/>
                 <a:ea typeface="Arial"/>
@@ -6606,7 +6621,7 @@
               <a:buNone/>
               <a:defRPr sz="1650" b="0">
                 <a:solidFill>
-                  <a:srgbClr val="647887"/>
+                  <a:srgbClr val="00355F"/>
                 </a:solidFill>
                 <a:latin typeface="Arial"/>
                 <a:ea typeface="Arial"/>
@@ -6616,7 +6631,7 @@
             <a:r>
               <a:rPr sz="1650" b="0">
                 <a:solidFill>
-                  <a:srgbClr val="647887"/>
+                  <a:srgbClr val="00355F"/>
                 </a:solidFill>
                 <a:latin typeface="Arial"/>
                 <a:ea typeface="Arial"/>
@@ -6633,7 +6648,7 @@
               <a:buNone/>
               <a:defRPr sz="1650" b="0">
                 <a:solidFill>
-                  <a:srgbClr val="647887"/>
+                  <a:srgbClr val="00355F"/>
                 </a:solidFill>
                 <a:latin typeface="Arial"/>
                 <a:ea typeface="Arial"/>
@@ -6643,7 +6658,7 @@
             <a:r>
               <a:rPr sz="1650" b="0">
                 <a:solidFill>
-                  <a:srgbClr val="647887"/>
+                  <a:srgbClr val="00355F"/>
                 </a:solidFill>
                 <a:latin typeface="Arial"/>
                 <a:ea typeface="Arial"/>
@@ -6659,7 +6674,7 @@
           <p:cNvPr id="67" name="LST supports every return to physical biology">
             <a:extLst xmlns:a="http://schemas.openxmlformats.org/drawingml/2006/main">
               <a:ext uri="{FF2B5EF4-FFF2-40B4-BE49-F238E27FC236}">
-                <a16:creationId xmlns:a16="http://schemas.microsoft.com/office/drawing/2014/main" id="{5BCFFD6D-7D56-42F0-BC89-85B83C973300}"/>
+                <a16:creationId xmlns:a16="http://schemas.microsoft.com/office/drawing/2014/main" id="{F7C61A16-01B0-4867-A55C-540A01FA6A56}"/>
               </a:ext>
             </a:extLst>
           </p:cNvPr>
@@ -6687,7 +6702,7 @@
             <a:defPPr algn="l">
               <a:defRPr sz="2100" b="1">
                 <a:solidFill>
-                  <a:srgbClr val="152C3A"/>
+                  <a:srgbClr val="00355F"/>
                 </a:solidFill>
                 <a:latin typeface="Arial"/>
                 <a:ea typeface="Arial"/>
@@ -6703,7 +6718,7 @@
               <a:buNone/>
               <a:defRPr sz="2100" b="1">
                 <a:solidFill>
-                  <a:srgbClr val="152C3A"/>
+                  <a:srgbClr val="00355F"/>
                 </a:solidFill>
                 <a:latin typeface="Arial"/>
                 <a:ea typeface="Arial"/>
@@ -6713,7 +6728,7 @@
             <a:r>
               <a:rPr sz="2100" b="1">
                 <a:solidFill>
-                  <a:srgbClr val="152C3A"/>
+                  <a:srgbClr val="00355F"/>
                 </a:solidFill>
                 <a:latin typeface="Arial"/>
                 <a:ea typeface="Arial"/>
@@ -6729,7 +6744,7 @@
           <p:cNvPr id="68" name="">
             <a:extLst xmlns:a="http://schemas.openxmlformats.org/drawingml/2006/main">
               <a:ext uri="{FF2B5EF4-FFF2-40B4-BE49-F238E27FC236}">
-                <a16:creationId xmlns:a16="http://schemas.microsoft.com/office/drawing/2014/main" id="{C6426D0C-5CC8-4DE3-A814-E8CAE852543F}"/>
+                <a16:creationId xmlns:a16="http://schemas.microsoft.com/office/drawing/2014/main" id="{C4191135-0ADD-4E82-8A40-44E583068D7C}"/>
               </a:ext>
             </a:extLst>
           </p:cNvPr>
@@ -6749,11 +6764,11 @@
             </a:avLst>
           </a:prstGeom>
           <a:solidFill xmlns:a="http://schemas.openxmlformats.org/drawingml/2006/main">
-            <a:srgbClr val="F5F8F9"/>
+            <a:srgbClr val="F4F9FD"/>
           </a:solidFill>
           <a:ln xmlns:a="http://schemas.openxmlformats.org/drawingml/2006/main" w="9525">
             <a:solidFill>
-              <a:srgbClr val="D7E3E8"/>
+              <a:srgbClr val="A5A5A5"/>
             </a:solidFill>
           </a:ln>
         </p:spPr>
@@ -6763,7 +6778,7 @@
           <p:cNvPr id="69" name="">
             <a:extLst xmlns:a="http://schemas.openxmlformats.org/drawingml/2006/main">
               <a:ext uri="{FF2B5EF4-FFF2-40B4-BE49-F238E27FC236}">
-                <a16:creationId xmlns:a16="http://schemas.microsoft.com/office/drawing/2014/main" id="{B9097CAB-24F3-4DB1-99CA-053B88A85E19}"/>
+                <a16:creationId xmlns:a16="http://schemas.microsoft.com/office/drawing/2014/main" id="{751D2E81-7D7A-4FC4-A3DA-12AAABF35402}"/>
               </a:ext>
             </a:extLst>
           </p:cNvPr>
@@ -6792,7 +6807,7 @@
           <a:noFill xmlns:a="http://schemas.openxmlformats.org/drawingml/2006/main"/>
           <a:ln xmlns:a="http://schemas.openxmlformats.org/drawingml/2006/main" w="9525">
             <a:solidFill>
-              <a:srgbClr val="D7E3E8"/>
+              <a:srgbClr val="A5A5A5"/>
             </a:solidFill>
           </a:ln>
         </p:spPr>
@@ -6802,7 +6817,7 @@
           <p:cNvPr id="70" name="">
             <a:extLst xmlns:a="http://schemas.openxmlformats.org/drawingml/2006/main">
               <a:ext uri="{FF2B5EF4-FFF2-40B4-BE49-F238E27FC236}">
-                <a16:creationId xmlns:a16="http://schemas.microsoft.com/office/drawing/2014/main" id="{BE50B3D9-25CD-4437-B2A1-53786D45C686}"/>
+                <a16:creationId xmlns:a16="http://schemas.microsoft.com/office/drawing/2014/main" id="{323A2193-4EA9-41B7-877A-9DC05F9A61A9}"/>
               </a:ext>
             </a:extLst>
           </p:cNvPr>
@@ -6831,7 +6846,7 @@
           <a:noFill xmlns:a="http://schemas.openxmlformats.org/drawingml/2006/main"/>
           <a:ln xmlns:a="http://schemas.openxmlformats.org/drawingml/2006/main" w="9525">
             <a:solidFill>
-              <a:srgbClr val="D7E3E8"/>
+              <a:srgbClr val="A5A5A5"/>
             </a:solidFill>
           </a:ln>
         </p:spPr>
@@ -6841,7 +6856,7 @@
           <p:cNvPr id="71" name="">
             <a:extLst xmlns:a="http://schemas.openxmlformats.org/drawingml/2006/main">
               <a:ext uri="{FF2B5EF4-FFF2-40B4-BE49-F238E27FC236}">
-                <a16:creationId xmlns:a16="http://schemas.microsoft.com/office/drawing/2014/main" id="{84653AE1-5D4F-4CEE-A7DF-08AAA4C5F911}"/>
+                <a16:creationId xmlns:a16="http://schemas.microsoft.com/office/drawing/2014/main" id="{373BBC5E-F6DF-4AAC-B0B0-A391F130F6A4}"/>
               </a:ext>
             </a:extLst>
           </p:cNvPr>
@@ -6851,10 +6866,10 @@
           <p:nvPr/>
         </p:nvPicPr>
         <p:blipFill>
-          <a:blip xmlns:r="http://schemas.openxmlformats.org/officeDocument/2006/relationships" xmlns:a="http://schemas.openxmlformats.org/drawingml/2006/main" r:embed="R4451f911a1954490">
+          <a:blip xmlns:r="http://schemas.openxmlformats.org/officeDocument/2006/relationships" xmlns:a="http://schemas.openxmlformats.org/drawingml/2006/main" r:embed="R52e39a8692fd4bc8">
             <a:extLst>
               <a:ext uri="{96DAC541-7B7A-43D3-8B79-37D633B846F1}">
-                <asvg:svgBlip xmlns:asvg="http://schemas.microsoft.com/office/drawing/2016/SVG/main" r:embed="R61e6e2f78e8a449a"/>
+                <asvg:svgBlip xmlns:asvg="http://schemas.microsoft.com/office/drawing/2016/SVG/main" r:embed="R4e1bf600c5c34b91"/>
               </a:ext>
             </a:extLst>
           </a:blip>
@@ -6875,7 +6890,7 @@
           <p:cNvPr id="72" name="BUILD">
             <a:extLst xmlns:a="http://schemas.openxmlformats.org/drawingml/2006/main">
               <a:ext uri="{FF2B5EF4-FFF2-40B4-BE49-F238E27FC236}">
-                <a16:creationId xmlns:a16="http://schemas.microsoft.com/office/drawing/2014/main" id="{E3A4AC13-7BBD-4B78-985A-5BE848BF0A5B}"/>
+                <a16:creationId xmlns:a16="http://schemas.microsoft.com/office/drawing/2014/main" id="{241ADC41-05BC-459F-927E-5E94C8F40C1F}"/>
               </a:ext>
             </a:extLst>
           </p:cNvPr>
@@ -6903,7 +6918,7 @@
             <a:defPPr algn="l">
               <a:defRPr sz="1725" b="1">
                 <a:solidFill>
-                  <a:srgbClr val="007D80"/>
+                  <a:srgbClr val="00355F"/>
                 </a:solidFill>
                 <a:latin typeface="Arial"/>
                 <a:ea typeface="Arial"/>
@@ -6919,7 +6934,7 @@
               <a:buNone/>
               <a:defRPr sz="1725" b="1">
                 <a:solidFill>
-                  <a:srgbClr val="007D80"/>
+                  <a:srgbClr val="00355F"/>
                 </a:solidFill>
                 <a:latin typeface="Arial"/>
                 <a:ea typeface="Arial"/>
@@ -6929,7 +6944,7 @@
             <a:r>
               <a:rPr sz="1725" b="1">
                 <a:solidFill>
-                  <a:srgbClr val="007D80"/>
+                  <a:srgbClr val="00355F"/>
                 </a:solidFill>
                 <a:latin typeface="Arial"/>
                 <a:ea typeface="Arial"/>
@@ -6945,7 +6960,7 @@
           <p:cNvPr id="73" name="DNA synthesis · expression · purification">
             <a:extLst xmlns:a="http://schemas.openxmlformats.org/drawingml/2006/main">
               <a:ext uri="{FF2B5EF4-FFF2-40B4-BE49-F238E27FC236}">
-                <a16:creationId xmlns:a16="http://schemas.microsoft.com/office/drawing/2014/main" id="{1CCD9E88-87D9-408F-9FE0-3AC64F8910E0}"/>
+                <a16:creationId xmlns:a16="http://schemas.microsoft.com/office/drawing/2014/main" id="{266D28FA-2EDD-4DEE-86F4-E449E2B70D92}"/>
               </a:ext>
             </a:extLst>
           </p:cNvPr>
@@ -6973,7 +6988,7 @@
             <a:defPPr algn="l">
               <a:defRPr sz="1575" b="0">
                 <a:solidFill>
-                  <a:srgbClr val="647887"/>
+                  <a:srgbClr val="00355F"/>
                 </a:solidFill>
                 <a:latin typeface="Arial"/>
                 <a:ea typeface="Arial"/>
@@ -6989,7 +7004,7 @@
               <a:buNone/>
               <a:defRPr sz="1575" b="0">
                 <a:solidFill>
-                  <a:srgbClr val="647887"/>
+                  <a:srgbClr val="00355F"/>
                 </a:solidFill>
                 <a:latin typeface="Arial"/>
                 <a:ea typeface="Arial"/>
@@ -6999,7 +7014,7 @@
             <a:r>
               <a:rPr sz="1575" b="0">
                 <a:solidFill>
-                  <a:srgbClr val="647887"/>
+                  <a:srgbClr val="00355F"/>
                 </a:solidFill>
                 <a:latin typeface="Arial"/>
                 <a:ea typeface="Arial"/>
@@ -7015,7 +7030,7 @@
           <p:cNvPr id="74" name="">
             <a:extLst xmlns:a="http://schemas.openxmlformats.org/drawingml/2006/main">
               <a:ext uri="{FF2B5EF4-FFF2-40B4-BE49-F238E27FC236}">
-                <a16:creationId xmlns:a16="http://schemas.microsoft.com/office/drawing/2014/main" id="{C28EF583-BE76-4D33-AA90-63E09AFDF983}"/>
+                <a16:creationId xmlns:a16="http://schemas.microsoft.com/office/drawing/2014/main" id="{16A0F01B-3CBA-4825-975D-0D5D0F4D9DE6}"/>
               </a:ext>
             </a:extLst>
           </p:cNvPr>
@@ -7025,10 +7040,10 @@
           <p:nvPr/>
         </p:nvPicPr>
         <p:blipFill>
-          <a:blip xmlns:r="http://schemas.openxmlformats.org/officeDocument/2006/relationships" xmlns:a="http://schemas.openxmlformats.org/drawingml/2006/main" r:embed="Rcb3416d9f20242df">
+          <a:blip xmlns:r="http://schemas.openxmlformats.org/officeDocument/2006/relationships" xmlns:a="http://schemas.openxmlformats.org/drawingml/2006/main" r:embed="Rbe998a8577604ce0">
             <a:extLst>
               <a:ext uri="{96DAC541-7B7A-43D3-8B79-37D633B846F1}">
-                <asvg:svgBlip xmlns:asvg="http://schemas.microsoft.com/office/drawing/2016/SVG/main" r:embed="R8eb8b86370ef4eac"/>
+                <asvg:svgBlip xmlns:asvg="http://schemas.microsoft.com/office/drawing/2016/SVG/main" r:embed="R135ea450ca6d47d0"/>
               </a:ext>
             </a:extLst>
           </a:blip>
@@ -7049,7 +7064,7 @@
           <p:cNvPr id="75" name="TEST">
             <a:extLst xmlns:a="http://schemas.openxmlformats.org/drawingml/2006/main">
               <a:ext uri="{FF2B5EF4-FFF2-40B4-BE49-F238E27FC236}">
-                <a16:creationId xmlns:a16="http://schemas.microsoft.com/office/drawing/2014/main" id="{F26477A5-B636-49F4-B272-3DC020428FB1}"/>
+                <a16:creationId xmlns:a16="http://schemas.microsoft.com/office/drawing/2014/main" id="{92C08FCB-4155-425A-A8B6-1C65BBDCFC3C}"/>
               </a:ext>
             </a:extLst>
           </p:cNvPr>
@@ -7077,7 +7092,7 @@
             <a:defPPr algn="l">
               <a:defRPr sz="1725" b="1">
                 <a:solidFill>
-                  <a:srgbClr val="007D80"/>
+                  <a:srgbClr val="00355F"/>
                 </a:solidFill>
                 <a:latin typeface="Arial"/>
                 <a:ea typeface="Arial"/>
@@ -7093,7 +7108,7 @@
               <a:buNone/>
               <a:defRPr sz="1725" b="1">
                 <a:solidFill>
-                  <a:srgbClr val="007D80"/>
+                  <a:srgbClr val="00355F"/>
                 </a:solidFill>
                 <a:latin typeface="Arial"/>
                 <a:ea typeface="Arial"/>
@@ -7103,7 +7118,7 @@
             <a:r>
               <a:rPr sz="1725" b="1">
                 <a:solidFill>
-                  <a:srgbClr val="007D80"/>
+                  <a:srgbClr val="00355F"/>
                 </a:solidFill>
                 <a:latin typeface="Arial"/>
                 <a:ea typeface="Arial"/>
@@ -7119,7 +7134,7 @@
           <p:cNvPr id="76" name="Proteins · biosensors · analytical columns">
             <a:extLst xmlns:a="http://schemas.openxmlformats.org/drawingml/2006/main">
               <a:ext uri="{FF2B5EF4-FFF2-40B4-BE49-F238E27FC236}">
-                <a16:creationId xmlns:a16="http://schemas.microsoft.com/office/drawing/2014/main" id="{36E2D6FF-97DC-4257-9386-7EBC374CEC54}"/>
+                <a16:creationId xmlns:a16="http://schemas.microsoft.com/office/drawing/2014/main" id="{0671F6BB-7982-4579-A2F2-CC219FA02900}"/>
               </a:ext>
             </a:extLst>
           </p:cNvPr>
@@ -7147,7 +7162,7 @@
             <a:defPPr algn="l">
               <a:defRPr sz="1575" b="0">
                 <a:solidFill>
-                  <a:srgbClr val="647887"/>
+                  <a:srgbClr val="00355F"/>
                 </a:solidFill>
                 <a:latin typeface="Arial"/>
                 <a:ea typeface="Arial"/>
@@ -7163,7 +7178,7 @@
               <a:buNone/>
               <a:defRPr sz="1575" b="0">
                 <a:solidFill>
-                  <a:srgbClr val="647887"/>
+                  <a:srgbClr val="00355F"/>
                 </a:solidFill>
                 <a:latin typeface="Arial"/>
                 <a:ea typeface="Arial"/>
@@ -7173,7 +7188,7 @@
             <a:r>
               <a:rPr sz="1575" b="0">
                 <a:solidFill>
-                  <a:srgbClr val="647887"/>
+                  <a:srgbClr val="00355F"/>
                 </a:solidFill>
                 <a:latin typeface="Arial"/>
                 <a:ea typeface="Arial"/>
@@ -7190,7 +7205,7 @@
               <a:buNone/>
               <a:defRPr sz="1575" b="0">
                 <a:solidFill>
-                  <a:srgbClr val="647887"/>
+                  <a:srgbClr val="00355F"/>
                 </a:solidFill>
                 <a:latin typeface="Arial"/>
                 <a:ea typeface="Arial"/>
@@ -7200,7 +7215,7 @@
             <a:r>
               <a:rPr sz="1575" b="0">
                 <a:solidFill>
-                  <a:srgbClr val="647887"/>
+                  <a:srgbClr val="00355F"/>
                 </a:solidFill>
                 <a:latin typeface="Arial"/>
                 <a:ea typeface="Arial"/>
@@ -7216,7 +7231,7 @@
           <p:cNvPr id="77" name="">
             <a:extLst xmlns:a="http://schemas.openxmlformats.org/drawingml/2006/main">
               <a:ext uri="{FF2B5EF4-FFF2-40B4-BE49-F238E27FC236}">
-                <a16:creationId xmlns:a16="http://schemas.microsoft.com/office/drawing/2014/main" id="{1656DD66-0E57-4609-B5B4-F9B9090776B9}"/>
+                <a16:creationId xmlns:a16="http://schemas.microsoft.com/office/drawing/2014/main" id="{8C5F4313-D683-4612-B464-9B69670FFCEB}"/>
               </a:ext>
             </a:extLst>
           </p:cNvPr>
@@ -7226,10 +7241,10 @@
           <p:nvPr/>
         </p:nvPicPr>
         <p:blipFill>
-          <a:blip xmlns:r="http://schemas.openxmlformats.org/officeDocument/2006/relationships" xmlns:a="http://schemas.openxmlformats.org/drawingml/2006/main" r:embed="R74b803d7ddf8499b">
+          <a:blip xmlns:r="http://schemas.openxmlformats.org/officeDocument/2006/relationships" xmlns:a="http://schemas.openxmlformats.org/drawingml/2006/main" r:embed="Rd9349dccb48545e1">
             <a:extLst>
               <a:ext uri="{96DAC541-7B7A-43D3-8B79-37D633B846F1}">
-                <asvg:svgBlip xmlns:asvg="http://schemas.microsoft.com/office/drawing/2016/SVG/main" r:embed="R469b5caea82840bd"/>
+                <asvg:svgBlip xmlns:asvg="http://schemas.microsoft.com/office/drawing/2016/SVG/main" r:embed="R1e63c7831643445d"/>
               </a:ext>
             </a:extLst>
           </a:blip>
@@ -7250,7 +7265,7 @@
           <p:cNvPr id="78" name="CONNECT + SCALE">
             <a:extLst xmlns:a="http://schemas.openxmlformats.org/drawingml/2006/main">
               <a:ext uri="{FF2B5EF4-FFF2-40B4-BE49-F238E27FC236}">
-                <a16:creationId xmlns:a16="http://schemas.microsoft.com/office/drawing/2014/main" id="{885E3916-D69A-48B9-8547-7C03F70470C6}"/>
+                <a16:creationId xmlns:a16="http://schemas.microsoft.com/office/drawing/2014/main" id="{65A93120-94C7-4616-B956-56607314E109}"/>
               </a:ext>
             </a:extLst>
           </p:cNvPr>
@@ -7278,7 +7293,7 @@
             <a:defPPr algn="l">
               <a:defRPr sz="1725" b="1">
                 <a:solidFill>
-                  <a:srgbClr val="007D80"/>
+                  <a:srgbClr val="00355F"/>
                 </a:solidFill>
                 <a:latin typeface="Arial"/>
                 <a:ea typeface="Arial"/>
@@ -7294,7 +7309,7 @@
               <a:buNone/>
               <a:defRPr sz="1725" b="1">
                 <a:solidFill>
-                  <a:srgbClr val="007D80"/>
+                  <a:srgbClr val="00355F"/>
                 </a:solidFill>
                 <a:latin typeface="Arial"/>
                 <a:ea typeface="Arial"/>
@@ -7304,7 +7319,7 @@
             <a:r>
               <a:rPr sz="1725" b="1">
                 <a:solidFill>
-                  <a:srgbClr val="007D80"/>
+                  <a:srgbClr val="00355F"/>
                 </a:solidFill>
                 <a:latin typeface="Arial"/>
                 <a:ea typeface="Arial"/>
@@ -7320,7 +7335,7 @@
           <p:cNvPr id="79" name="Labware · automation · data platforms">
             <a:extLst xmlns:a="http://schemas.openxmlformats.org/drawingml/2006/main">
               <a:ext uri="{FF2B5EF4-FFF2-40B4-BE49-F238E27FC236}">
-                <a16:creationId xmlns:a16="http://schemas.microsoft.com/office/drawing/2014/main" id="{28EDEEC6-2DD3-4F6A-B139-B45EC3B8396C}"/>
+                <a16:creationId xmlns:a16="http://schemas.microsoft.com/office/drawing/2014/main" id="{878C0D36-5A53-497E-82A0-B480D46F4B6D}"/>
               </a:ext>
             </a:extLst>
           </p:cNvPr>
@@ -7348,7 +7363,7 @@
             <a:defPPr algn="l">
               <a:defRPr sz="1575" b="0">
                 <a:solidFill>
-                  <a:srgbClr val="647887"/>
+                  <a:srgbClr val="00355F"/>
                 </a:solidFill>
                 <a:latin typeface="Arial"/>
                 <a:ea typeface="Arial"/>
@@ -7364,7 +7379,7 @@
               <a:buNone/>
               <a:defRPr sz="1575" b="0">
                 <a:solidFill>
-                  <a:srgbClr val="647887"/>
+                  <a:srgbClr val="00355F"/>
                 </a:solidFill>
                 <a:latin typeface="Arial"/>
                 <a:ea typeface="Arial"/>
@@ -7374,7 +7389,7 @@
             <a:r>
               <a:rPr sz="1575" b="0">
                 <a:solidFill>
-                  <a:srgbClr val="647887"/>
+                  <a:srgbClr val="00355F"/>
                 </a:solidFill>
                 <a:latin typeface="Arial"/>
                 <a:ea typeface="Arial"/>
@@ -7391,7 +7406,7 @@
               <a:buNone/>
               <a:defRPr sz="1575" b="0">
                 <a:solidFill>
-                  <a:srgbClr val="647887"/>
+                  <a:srgbClr val="00355F"/>
                 </a:solidFill>
                 <a:latin typeface="Arial"/>
                 <a:ea typeface="Arial"/>
@@ -7401,7 +7416,7 @@
             <a:r>
               <a:rPr sz="1575" b="0">
                 <a:solidFill>
-                  <a:srgbClr val="647887"/>
+                  <a:srgbClr val="00355F"/>
                 </a:solidFill>
                 <a:latin typeface="Arial"/>
                 <a:ea typeface="Arial"/>
@@ -7417,7 +7432,7 @@
           <p:cNvPr id="80" name="">
             <a:extLst xmlns:a="http://schemas.openxmlformats.org/drawingml/2006/main">
               <a:ext uri="{FF2B5EF4-FFF2-40B4-BE49-F238E27FC236}">
-                <a16:creationId xmlns:a16="http://schemas.microsoft.com/office/drawing/2014/main" id="{94FE8FBB-17DF-4DFB-9C77-384DB622E6F2}"/>
+                <a16:creationId xmlns:a16="http://schemas.microsoft.com/office/drawing/2014/main" id="{5F85A6E0-D201-4EBA-B592-65599C456064}"/>
               </a:ext>
             </a:extLst>
           </p:cNvPr>
@@ -7437,7 +7452,7 @@
             </a:avLst>
           </a:prstGeom>
           <a:solidFill xmlns:a="http://schemas.openxmlformats.org/drawingml/2006/main">
-            <a:srgbClr val="152C3A"/>
+            <a:srgbClr val="00355F"/>
           </a:solidFill>
           <a:ln xmlns:a="http://schemas.openxmlformats.org/drawingml/2006/main" w="9525">
             <a:noFill/>
@@ -7449,7 +7464,7 @@
           <p:cNvPr id="81" name="The pace of improvement depends on useful experimental evidence per cycle">
             <a:extLst xmlns:a="http://schemas.openxmlformats.org/drawingml/2006/main">
               <a:ext uri="{FF2B5EF4-FFF2-40B4-BE49-F238E27FC236}">
-                <a16:creationId xmlns:a16="http://schemas.microsoft.com/office/drawing/2014/main" id="{19540246-9047-4141-B4BB-5F772E83F807}"/>
+                <a16:creationId xmlns:a16="http://schemas.microsoft.com/office/drawing/2014/main" id="{5B1C7FD4-97B5-4945-A85D-2586EA2B5681}"/>
               </a:ext>
             </a:extLst>
           </p:cNvPr>
@@ -7519,7 +7534,7 @@
           <p:cNvPr id="82" name="Potential LST demand ∝ funded cycles × assay depth × net inputs per assay">
             <a:extLst xmlns:a="http://schemas.openxmlformats.org/drawingml/2006/main">
               <a:ext uri="{FF2B5EF4-FFF2-40B4-BE49-F238E27FC236}">
-                <a16:creationId xmlns:a16="http://schemas.microsoft.com/office/drawing/2014/main" id="{8F8B5E1B-4BB1-4F5C-8F3B-7AC5C823DD2B}"/>
+                <a16:creationId xmlns:a16="http://schemas.microsoft.com/office/drawing/2014/main" id="{E62DE3D1-A4C5-42D5-B00E-87AA6046DF1C}"/>
               </a:ext>
             </a:extLst>
           </p:cNvPr>
@@ -7547,7 +7562,7 @@
             <a:defPPr algn="l">
               <a:defRPr sz="2175" b="1">
                 <a:solidFill>
-                  <a:srgbClr val="152C3A"/>
+                  <a:srgbClr val="00355F"/>
                 </a:solidFill>
                 <a:latin typeface="Arial"/>
                 <a:ea typeface="Arial"/>
@@ -7563,7 +7578,7 @@
               <a:buNone/>
               <a:defRPr sz="2175" b="1">
                 <a:solidFill>
-                  <a:srgbClr val="152C3A"/>
+                  <a:srgbClr val="00355F"/>
                 </a:solidFill>
                 <a:latin typeface="Arial"/>
                 <a:ea typeface="Arial"/>
@@ -7573,7 +7588,7 @@
             <a:r>
               <a:rPr sz="2175" b="1">
                 <a:solidFill>
-                  <a:srgbClr val="152C3A"/>
+                  <a:srgbClr val="00355F"/>
                 </a:solidFill>
                 <a:latin typeface="Arial"/>
                 <a:ea typeface="Arial"/>
@@ -7589,7 +7604,7 @@
           <p:cNvPr id="83" name="Automation and miniaturization can reduce inputs per measurement; instrument CAPEX is separate.">
             <a:extLst xmlns:a="http://schemas.openxmlformats.org/drawingml/2006/main">
               <a:ext uri="{FF2B5EF4-FFF2-40B4-BE49-F238E27FC236}">
-                <a16:creationId xmlns:a16="http://schemas.microsoft.com/office/drawing/2014/main" id="{94F2ADCE-675A-4CA4-AF4C-0C07BCE8DD04}"/>
+                <a16:creationId xmlns:a16="http://schemas.microsoft.com/office/drawing/2014/main" id="{531E7CDF-3198-4759-B5DE-685DAB9E6A8E}"/>
               </a:ext>
             </a:extLst>
           </p:cNvPr>
@@ -7617,7 +7632,7 @@
             <a:defPPr algn="l">
               <a:defRPr sz="1500" b="0">
                 <a:solidFill>
-                  <a:srgbClr val="647887"/>
+                  <a:srgbClr val="00355F"/>
                 </a:solidFill>
                 <a:latin typeface="Arial"/>
                 <a:ea typeface="Arial"/>
@@ -7633,7 +7648,7 @@
               <a:buNone/>
               <a:defRPr sz="1500" b="0">
                 <a:solidFill>
-                  <a:srgbClr val="647887"/>
+                  <a:srgbClr val="00355F"/>
                 </a:solidFill>
                 <a:latin typeface="Arial"/>
                 <a:ea typeface="Arial"/>
@@ -7643,7 +7658,7 @@
             <a:r>
               <a:rPr sz="1500" b="0">
                 <a:solidFill>
-                  <a:srgbClr val="647887"/>
+                  <a:srgbClr val="00355F"/>
                 </a:solidFill>
                 <a:latin typeface="Arial"/>
                 <a:ea typeface="Arial"/>
@@ -7659,7 +7674,7 @@
           <p:cNvPr id="84" name="Conceptual RSI mechanism. Closed-loop learning does not establish sustained autonomous RSI. Primary sources: SOURCES.md.">
             <a:extLst xmlns:a="http://schemas.openxmlformats.org/drawingml/2006/main">
               <a:ext uri="{FF2B5EF4-FFF2-40B4-BE49-F238E27FC236}">
-                <a16:creationId xmlns:a16="http://schemas.microsoft.com/office/drawing/2014/main" id="{439E81AF-31E9-46DB-916B-19C0F94C600B}"/>
+                <a16:creationId xmlns:a16="http://schemas.microsoft.com/office/drawing/2014/main" id="{193A0866-974B-4595-BBFC-E1AAC8DFF244}"/>
               </a:ext>
             </a:extLst>
           </p:cNvPr>
@@ -7687,7 +7702,7 @@
             <a:defPPr algn="l">
               <a:defRPr sz="1200" b="0">
                 <a:solidFill>
-                  <a:srgbClr val="647887"/>
+                  <a:srgbClr val="00355F"/>
                 </a:solidFill>
                 <a:latin typeface="Arial"/>
                 <a:ea typeface="Arial"/>
@@ -7703,7 +7718,7 @@
               <a:buNone/>
               <a:defRPr sz="1200" b="0">
                 <a:solidFill>
-                  <a:srgbClr val="647887"/>
+                  <a:srgbClr val="00355F"/>
                 </a:solidFill>
                 <a:latin typeface="Arial"/>
                 <a:ea typeface="Arial"/>
@@ -7713,7 +7728,7 @@
             <a:r>
               <a:rPr sz="1200" b="0">
                 <a:solidFill>
-                  <a:srgbClr val="647887"/>
+                  <a:srgbClr val="00355F"/>
                 </a:solidFill>
                 <a:latin typeface="Arial"/>
                 <a:ea typeface="Arial"/>
@@ -7727,7 +7742,7 @@
     </p:spTree>
     <p:extLst>
       <p:ext uri="{BB962C8B-B14F-4D97-AF65-F5344CB8AC3E}">
-        <p14:creationId xmlns:p14="http://schemas.microsoft.com/office/powerpoint/2010/main" val="1793809648"/>
+        <p14:creationId xmlns:p14="http://schemas.microsoft.com/office/powerpoint/2010/main" val="1675059462"/>
       </p:ext>
     </p:extLst>
   </p:cSld>
